--- a/System-Development-for STS-G4.pptx
+++ b/System-Development-for STS-G4.pptx
@@ -1,36 +1,36 @@
 
 <file path=ppt/presentation.xml><?xml version="1.0" encoding="utf-8"?>
-<p:presentation xmlns:a="http://schemas.openxmlformats.org/drawingml/2006/main" xmlns:r="http://schemas.openxmlformats.org/officeDocument/2006/relationships" xmlns:p="http://schemas.openxmlformats.org/presentationml/2006/main" saveSubsetFonts="1" embedTrueTypeFonts="true">
+<p:presentation xmlns:a="http://schemas.openxmlformats.org/drawingml/2006/main" xmlns:r="http://schemas.openxmlformats.org/officeDocument/2006/relationships" xmlns:p="http://schemas.openxmlformats.org/presentationml/2006/main" embedTrueTypeFonts="1" saveSubsetFonts="1">
   <p:sldMasterIdLst>
     <p:sldMasterId id="2147483648" r:id="rId1"/>
   </p:sldMasterIdLst>
   <p:sldIdLst>
-    <p:sldId id="256" r:id="rId6"/>
-    <p:sldId id="257" r:id="rId7"/>
-    <p:sldId id="258" r:id="rId8"/>
-    <p:sldId id="259" r:id="rId9"/>
-    <p:sldId id="260" r:id="rId10"/>
-    <p:sldId id="261" r:id="rId11"/>
-    <p:sldId id="262" r:id="rId12"/>
+    <p:sldId id="256" r:id="rId2"/>
+    <p:sldId id="257" r:id="rId3"/>
+    <p:sldId id="258" r:id="rId4"/>
+    <p:sldId id="259" r:id="rId5"/>
+    <p:sldId id="260" r:id="rId6"/>
+    <p:sldId id="261" r:id="rId7"/>
+    <p:sldId id="262" r:id="rId8"/>
   </p:sldIdLst>
   <p:sldSz cx="18288000" cy="10287000"/>
   <p:notesSz cx="6858000" cy="9144000"/>
   <p:embeddedFontLst>
     <p:embeddedFont>
-      <p:font typeface="League Spartan" charset="1" panose="00000800000000000000"/>
-      <p:regular r:id="rId13"/>
+      <p:font typeface="League Spartan" panose="020B0604020202020204" charset="0"/>
+      <p:regular r:id="rId9"/>
     </p:embeddedFont>
     <p:embeddedFont>
-      <p:font typeface="Poppins Semi-Bold" charset="1" panose="00000700000000000000"/>
-      <p:regular r:id="rId14"/>
+      <p:font typeface="Poppins" panose="00000500000000000000" pitchFamily="2" charset="0"/>
+      <p:regular r:id="rId10"/>
     </p:embeddedFont>
     <p:embeddedFont>
-      <p:font typeface="Poppins Medium" charset="1" panose="00000600000000000000"/>
-      <p:regular r:id="rId15"/>
+      <p:font typeface="Poppins Medium" panose="020B0502040204020203" pitchFamily="2" charset="0"/>
+      <p:regular r:id="rId11"/>
     </p:embeddedFont>
     <p:embeddedFont>
-      <p:font typeface="Poppins" charset="1" panose="00000500000000000000"/>
-      <p:regular r:id="rId16"/>
+      <p:font typeface="Poppins Semi-Bold" panose="020B0604020202020204" charset="0"/>
+      <p:regular r:id="rId12"/>
     </p:embeddedFont>
   </p:embeddedFontLst>
   <p:defaultTextStyle>
@@ -128,6 +128,22 @@
       </a:defRPr>
     </a:lvl9pPr>
   </p:defaultTextStyle>
+  <p:extLst>
+    <p:ext uri="{EFAFB233-063F-42B5-8137-9DF3F51BA10A}">
+      <p15:sldGuideLst xmlns:p15="http://schemas.microsoft.com/office/powerpoint/2012/main">
+        <p15:guide id="1" orient="horz" pos="2160">
+          <p15:clr>
+            <a:srgbClr val="A4A3A4"/>
+          </p15:clr>
+        </p15:guide>
+        <p15:guide id="2" pos="2880">
+          <p15:clr>
+            <a:srgbClr val="A4A3A4"/>
+          </p15:clr>
+        </p15:guide>
+      </p15:sldGuideLst>
+    </p:ext>
+  </p:extLst>
 </p:presentation>
 </file>
 
@@ -169,10 +185,9 @@
           <a:lstStyle/>
           <a:p>
             <a:r>
-              <a:rPr lang="en-US" smtClean="0"/>
+              <a:rPr lang="en-US"/>
               <a:t>Click to edit Master title style</a:t>
             </a:r>
-            <a:endParaRPr lang="en-US"/>
           </a:p>
         </p:txBody>
       </p:sp>
@@ -288,10 +303,9 @@
           </a:lstStyle>
           <a:p>
             <a:r>
-              <a:rPr lang="en-US" smtClean="0"/>
+              <a:rPr lang="en-US"/>
               <a:t>Click to edit Master subtitle style</a:t>
             </a:r>
-            <a:endParaRPr lang="en-US"/>
           </a:p>
         </p:txBody>
       </p:sp>
@@ -313,7 +327,7 @@
             <a:fld id="{1D8BD707-D9CF-40AE-B4C6-C98DA3205C09}" type="datetimeFigureOut">
               <a:rPr lang="en-US" smtClean="0"/>
               <a:pPr/>
-              <a:t>8/1/2011</a:t>
+              <a:t>6/3/2026</a:t>
             </a:fld>
             <a:endParaRPr lang="en-US"/>
           </a:p>
@@ -403,10 +417,9 @@
           <a:lstStyle/>
           <a:p>
             <a:r>
-              <a:rPr lang="en-US" smtClean="0"/>
+              <a:rPr lang="en-US"/>
               <a:t>Click to edit Master title style</a:t>
             </a:r>
-            <a:endParaRPr lang="en-US"/>
           </a:p>
         </p:txBody>
       </p:sp>
@@ -427,38 +440,37 @@
           <a:p>
             <a:pPr lvl="0"/>
             <a:r>
-              <a:rPr lang="en-US" smtClean="0"/>
+              <a:rPr lang="en-US"/>
               <a:t>Click to edit Master text styles</a:t>
             </a:r>
           </a:p>
           <a:p>
             <a:pPr lvl="1"/>
             <a:r>
-              <a:rPr lang="en-US" smtClean="0"/>
+              <a:rPr lang="en-US"/>
               <a:t>Second level</a:t>
             </a:r>
           </a:p>
           <a:p>
             <a:pPr lvl="2"/>
             <a:r>
-              <a:rPr lang="en-US" smtClean="0"/>
+              <a:rPr lang="en-US"/>
               <a:t>Third level</a:t>
             </a:r>
           </a:p>
           <a:p>
             <a:pPr lvl="3"/>
             <a:r>
-              <a:rPr lang="en-US" smtClean="0"/>
+              <a:rPr lang="en-US"/>
               <a:t>Fourth level</a:t>
             </a:r>
           </a:p>
           <a:p>
             <a:pPr lvl="4"/>
             <a:r>
-              <a:rPr lang="en-US" smtClean="0"/>
+              <a:rPr lang="en-US"/>
               <a:t>Fifth level</a:t>
             </a:r>
-            <a:endParaRPr lang="en-US"/>
           </a:p>
         </p:txBody>
       </p:sp>
@@ -480,7 +492,7 @@
             <a:fld id="{1D8BD707-D9CF-40AE-B4C6-C98DA3205C09}" type="datetimeFigureOut">
               <a:rPr lang="en-US" smtClean="0"/>
               <a:pPr/>
-              <a:t>8/1/2011</a:t>
+              <a:t>6/3/2026</a:t>
             </a:fld>
             <a:endParaRPr lang="en-US"/>
           </a:p>
@@ -575,10 +587,9 @@
           <a:lstStyle/>
           <a:p>
             <a:r>
-              <a:rPr lang="en-US" smtClean="0"/>
+              <a:rPr lang="en-US"/>
               <a:t>Click to edit Master title style</a:t>
             </a:r>
-            <a:endParaRPr lang="en-US"/>
           </a:p>
         </p:txBody>
       </p:sp>
@@ -604,38 +615,37 @@
           <a:p>
             <a:pPr lvl="0"/>
             <a:r>
-              <a:rPr lang="en-US" smtClean="0"/>
+              <a:rPr lang="en-US"/>
               <a:t>Click to edit Master text styles</a:t>
             </a:r>
           </a:p>
           <a:p>
             <a:pPr lvl="1"/>
             <a:r>
-              <a:rPr lang="en-US" smtClean="0"/>
+              <a:rPr lang="en-US"/>
               <a:t>Second level</a:t>
             </a:r>
           </a:p>
           <a:p>
             <a:pPr lvl="2"/>
             <a:r>
-              <a:rPr lang="en-US" smtClean="0"/>
+              <a:rPr lang="en-US"/>
               <a:t>Third level</a:t>
             </a:r>
           </a:p>
           <a:p>
             <a:pPr lvl="3"/>
             <a:r>
-              <a:rPr lang="en-US" smtClean="0"/>
+              <a:rPr lang="en-US"/>
               <a:t>Fourth level</a:t>
             </a:r>
           </a:p>
           <a:p>
             <a:pPr lvl="4"/>
             <a:r>
-              <a:rPr lang="en-US" smtClean="0"/>
+              <a:rPr lang="en-US"/>
               <a:t>Fifth level</a:t>
             </a:r>
-            <a:endParaRPr lang="en-US"/>
           </a:p>
         </p:txBody>
       </p:sp>
@@ -657,7 +667,7 @@
             <a:fld id="{1D8BD707-D9CF-40AE-B4C6-C98DA3205C09}" type="datetimeFigureOut">
               <a:rPr lang="en-US" smtClean="0"/>
               <a:pPr/>
-              <a:t>8/1/2011</a:t>
+              <a:t>6/3/2026</a:t>
             </a:fld>
             <a:endParaRPr lang="en-US"/>
           </a:p>
@@ -747,10 +757,9 @@
           <a:lstStyle/>
           <a:p>
             <a:r>
-              <a:rPr lang="en-US" smtClean="0"/>
+              <a:rPr lang="en-US"/>
               <a:t>Click to edit Master title style</a:t>
             </a:r>
-            <a:endParaRPr lang="en-US"/>
           </a:p>
         </p:txBody>
       </p:sp>
@@ -771,38 +780,37 @@
           <a:p>
             <a:pPr lvl="0"/>
             <a:r>
-              <a:rPr lang="en-US" smtClean="0"/>
+              <a:rPr lang="en-US"/>
               <a:t>Click to edit Master text styles</a:t>
             </a:r>
           </a:p>
           <a:p>
             <a:pPr lvl="1"/>
             <a:r>
-              <a:rPr lang="en-US" smtClean="0"/>
+              <a:rPr lang="en-US"/>
               <a:t>Second level</a:t>
             </a:r>
           </a:p>
           <a:p>
             <a:pPr lvl="2"/>
             <a:r>
-              <a:rPr lang="en-US" smtClean="0"/>
+              <a:rPr lang="en-US"/>
               <a:t>Third level</a:t>
             </a:r>
           </a:p>
           <a:p>
             <a:pPr lvl="3"/>
             <a:r>
-              <a:rPr lang="en-US" smtClean="0"/>
+              <a:rPr lang="en-US"/>
               <a:t>Fourth level</a:t>
             </a:r>
           </a:p>
           <a:p>
             <a:pPr lvl="4"/>
             <a:r>
-              <a:rPr lang="en-US" smtClean="0"/>
+              <a:rPr lang="en-US"/>
               <a:t>Fifth level</a:t>
             </a:r>
-            <a:endParaRPr lang="en-US"/>
           </a:p>
         </p:txBody>
       </p:sp>
@@ -824,7 +832,7 @@
             <a:fld id="{1D8BD707-D9CF-40AE-B4C6-C98DA3205C09}" type="datetimeFigureOut">
               <a:rPr lang="en-US" smtClean="0"/>
               <a:pPr/>
-              <a:t>8/1/2011</a:t>
+              <a:t>6/3/2026</a:t>
             </a:fld>
             <a:endParaRPr lang="en-US"/>
           </a:p>
@@ -923,10 +931,9 @@
           </a:lstStyle>
           <a:p>
             <a:r>
-              <a:rPr lang="en-US" smtClean="0"/>
+              <a:rPr lang="en-US"/>
               <a:t>Click to edit Master title style</a:t>
             </a:r>
-            <a:endParaRPr lang="en-US"/>
           </a:p>
         </p:txBody>
       </p:sp>
@@ -1043,7 +1050,7 @@
           <a:p>
             <a:pPr lvl="0"/>
             <a:r>
-              <a:rPr lang="en-US" smtClean="0"/>
+              <a:rPr lang="en-US"/>
               <a:t>Click to edit Master text styles</a:t>
             </a:r>
           </a:p>
@@ -1067,7 +1074,7 @@
             <a:fld id="{1D8BD707-D9CF-40AE-B4C6-C98DA3205C09}" type="datetimeFigureOut">
               <a:rPr lang="en-US" smtClean="0"/>
               <a:pPr/>
-              <a:t>8/1/2011</a:t>
+              <a:t>6/3/2026</a:t>
             </a:fld>
             <a:endParaRPr lang="en-US"/>
           </a:p>
@@ -1157,10 +1164,9 @@
           <a:lstStyle/>
           <a:p>
             <a:r>
-              <a:rPr lang="en-US" smtClean="0"/>
+              <a:rPr lang="en-US"/>
               <a:t>Click to edit Master title style</a:t>
             </a:r>
-            <a:endParaRPr lang="en-US"/>
           </a:p>
         </p:txBody>
       </p:sp>
@@ -1214,38 +1220,37 @@
           <a:p>
             <a:pPr lvl="0"/>
             <a:r>
-              <a:rPr lang="en-US" smtClean="0"/>
+              <a:rPr lang="en-US"/>
               <a:t>Click to edit Master text styles</a:t>
             </a:r>
           </a:p>
           <a:p>
             <a:pPr lvl="1"/>
             <a:r>
-              <a:rPr lang="en-US" smtClean="0"/>
+              <a:rPr lang="en-US"/>
               <a:t>Second level</a:t>
             </a:r>
           </a:p>
           <a:p>
             <a:pPr lvl="2"/>
             <a:r>
-              <a:rPr lang="en-US" smtClean="0"/>
+              <a:rPr lang="en-US"/>
               <a:t>Third level</a:t>
             </a:r>
           </a:p>
           <a:p>
             <a:pPr lvl="3"/>
             <a:r>
-              <a:rPr lang="en-US" smtClean="0"/>
+              <a:rPr lang="en-US"/>
               <a:t>Fourth level</a:t>
             </a:r>
           </a:p>
           <a:p>
             <a:pPr lvl="4"/>
             <a:r>
-              <a:rPr lang="en-US" smtClean="0"/>
+              <a:rPr lang="en-US"/>
               <a:t>Fifth level</a:t>
             </a:r>
-            <a:endParaRPr lang="en-US"/>
           </a:p>
         </p:txBody>
       </p:sp>
@@ -1299,38 +1304,37 @@
           <a:p>
             <a:pPr lvl="0"/>
             <a:r>
-              <a:rPr lang="en-US" smtClean="0"/>
+              <a:rPr lang="en-US"/>
               <a:t>Click to edit Master text styles</a:t>
             </a:r>
           </a:p>
           <a:p>
             <a:pPr lvl="1"/>
             <a:r>
-              <a:rPr lang="en-US" smtClean="0"/>
+              <a:rPr lang="en-US"/>
               <a:t>Second level</a:t>
             </a:r>
           </a:p>
           <a:p>
             <a:pPr lvl="2"/>
             <a:r>
-              <a:rPr lang="en-US" smtClean="0"/>
+              <a:rPr lang="en-US"/>
               <a:t>Third level</a:t>
             </a:r>
           </a:p>
           <a:p>
             <a:pPr lvl="3"/>
             <a:r>
-              <a:rPr lang="en-US" smtClean="0"/>
+              <a:rPr lang="en-US"/>
               <a:t>Fourth level</a:t>
             </a:r>
           </a:p>
           <a:p>
             <a:pPr lvl="4"/>
             <a:r>
-              <a:rPr lang="en-US" smtClean="0"/>
+              <a:rPr lang="en-US"/>
               <a:t>Fifth level</a:t>
             </a:r>
-            <a:endParaRPr lang="en-US"/>
           </a:p>
         </p:txBody>
       </p:sp>
@@ -1352,7 +1356,7 @@
             <a:fld id="{1D8BD707-D9CF-40AE-B4C6-C98DA3205C09}" type="datetimeFigureOut">
               <a:rPr lang="en-US" smtClean="0"/>
               <a:pPr/>
-              <a:t>8/1/2011</a:t>
+              <a:t>6/3/2026</a:t>
             </a:fld>
             <a:endParaRPr lang="en-US"/>
           </a:p>
@@ -1446,10 +1450,9 @@
           </a:lstStyle>
           <a:p>
             <a:r>
-              <a:rPr lang="en-US" smtClean="0"/>
+              <a:rPr lang="en-US"/>
               <a:t>Click to edit Master title style</a:t>
             </a:r>
-            <a:endParaRPr lang="en-US"/>
           </a:p>
         </p:txBody>
       </p:sp>
@@ -1512,7 +1515,7 @@
           <a:p>
             <a:pPr lvl="0"/>
             <a:r>
-              <a:rPr lang="en-US" smtClean="0"/>
+              <a:rPr lang="en-US"/>
               <a:t>Click to edit Master text styles</a:t>
             </a:r>
           </a:p>
@@ -1568,38 +1571,37 @@
           <a:p>
             <a:pPr lvl="0"/>
             <a:r>
-              <a:rPr lang="en-US" smtClean="0"/>
+              <a:rPr lang="en-US"/>
               <a:t>Click to edit Master text styles</a:t>
             </a:r>
           </a:p>
           <a:p>
             <a:pPr lvl="1"/>
             <a:r>
-              <a:rPr lang="en-US" smtClean="0"/>
+              <a:rPr lang="en-US"/>
               <a:t>Second level</a:t>
             </a:r>
           </a:p>
           <a:p>
             <a:pPr lvl="2"/>
             <a:r>
-              <a:rPr lang="en-US" smtClean="0"/>
+              <a:rPr lang="en-US"/>
               <a:t>Third level</a:t>
             </a:r>
           </a:p>
           <a:p>
             <a:pPr lvl="3"/>
             <a:r>
-              <a:rPr lang="en-US" smtClean="0"/>
+              <a:rPr lang="en-US"/>
               <a:t>Fourth level</a:t>
             </a:r>
           </a:p>
           <a:p>
             <a:pPr lvl="4"/>
             <a:r>
-              <a:rPr lang="en-US" smtClean="0"/>
+              <a:rPr lang="en-US"/>
               <a:t>Fifth level</a:t>
             </a:r>
-            <a:endParaRPr lang="en-US"/>
           </a:p>
         </p:txBody>
       </p:sp>
@@ -1662,7 +1664,7 @@
           <a:p>
             <a:pPr lvl="0"/>
             <a:r>
-              <a:rPr lang="en-US" smtClean="0"/>
+              <a:rPr lang="en-US"/>
               <a:t>Click to edit Master text styles</a:t>
             </a:r>
           </a:p>
@@ -1718,38 +1720,37 @@
           <a:p>
             <a:pPr lvl="0"/>
             <a:r>
-              <a:rPr lang="en-US" smtClean="0"/>
+              <a:rPr lang="en-US"/>
               <a:t>Click to edit Master text styles</a:t>
             </a:r>
           </a:p>
           <a:p>
             <a:pPr lvl="1"/>
             <a:r>
-              <a:rPr lang="en-US" smtClean="0"/>
+              <a:rPr lang="en-US"/>
               <a:t>Second level</a:t>
             </a:r>
           </a:p>
           <a:p>
             <a:pPr lvl="2"/>
             <a:r>
-              <a:rPr lang="en-US" smtClean="0"/>
+              <a:rPr lang="en-US"/>
               <a:t>Third level</a:t>
             </a:r>
           </a:p>
           <a:p>
             <a:pPr lvl="3"/>
             <a:r>
-              <a:rPr lang="en-US" smtClean="0"/>
+              <a:rPr lang="en-US"/>
               <a:t>Fourth level</a:t>
             </a:r>
           </a:p>
           <a:p>
             <a:pPr lvl="4"/>
             <a:r>
-              <a:rPr lang="en-US" smtClean="0"/>
+              <a:rPr lang="en-US"/>
               <a:t>Fifth level</a:t>
             </a:r>
-            <a:endParaRPr lang="en-US"/>
           </a:p>
         </p:txBody>
       </p:sp>
@@ -1771,7 +1772,7 @@
             <a:fld id="{1D8BD707-D9CF-40AE-B4C6-C98DA3205C09}" type="datetimeFigureOut">
               <a:rPr lang="en-US" smtClean="0"/>
               <a:pPr/>
-              <a:t>8/1/2011</a:t>
+              <a:t>6/3/2026</a:t>
             </a:fld>
             <a:endParaRPr lang="en-US"/>
           </a:p>
@@ -1861,10 +1862,9 @@
           <a:lstStyle/>
           <a:p>
             <a:r>
-              <a:rPr lang="en-US" smtClean="0"/>
+              <a:rPr lang="en-US"/>
               <a:t>Click to edit Master title style</a:t>
             </a:r>
-            <a:endParaRPr lang="en-US"/>
           </a:p>
         </p:txBody>
       </p:sp>
@@ -1886,7 +1886,7 @@
             <a:fld id="{1D8BD707-D9CF-40AE-B4C6-C98DA3205C09}" type="datetimeFigureOut">
               <a:rPr lang="en-US" smtClean="0"/>
               <a:pPr/>
-              <a:t>8/1/2011</a:t>
+              <a:t>6/3/2026</a:t>
             </a:fld>
             <a:endParaRPr lang="en-US"/>
           </a:p>
@@ -1978,7 +1978,7 @@
             <a:fld id="{1D8BD707-D9CF-40AE-B4C6-C98DA3205C09}" type="datetimeFigureOut">
               <a:rPr lang="en-US" smtClean="0"/>
               <a:pPr/>
-              <a:t>8/1/2011</a:t>
+              <a:t>6/3/2026</a:t>
             </a:fld>
             <a:endParaRPr lang="en-US"/>
           </a:p>
@@ -2077,10 +2077,9 @@
           </a:lstStyle>
           <a:p>
             <a:r>
-              <a:rPr lang="en-US" smtClean="0"/>
+              <a:rPr lang="en-US"/>
               <a:t>Click to edit Master title style</a:t>
             </a:r>
-            <a:endParaRPr lang="en-US"/>
           </a:p>
         </p:txBody>
       </p:sp>
@@ -2134,38 +2133,37 @@
           <a:p>
             <a:pPr lvl="0"/>
             <a:r>
-              <a:rPr lang="en-US" smtClean="0"/>
+              <a:rPr lang="en-US"/>
               <a:t>Click to edit Master text styles</a:t>
             </a:r>
           </a:p>
           <a:p>
             <a:pPr lvl="1"/>
             <a:r>
-              <a:rPr lang="en-US" smtClean="0"/>
+              <a:rPr lang="en-US"/>
               <a:t>Second level</a:t>
             </a:r>
           </a:p>
           <a:p>
             <a:pPr lvl="2"/>
             <a:r>
-              <a:rPr lang="en-US" smtClean="0"/>
+              <a:rPr lang="en-US"/>
               <a:t>Third level</a:t>
             </a:r>
           </a:p>
           <a:p>
             <a:pPr lvl="3"/>
             <a:r>
-              <a:rPr lang="en-US" smtClean="0"/>
+              <a:rPr lang="en-US"/>
               <a:t>Fourth level</a:t>
             </a:r>
           </a:p>
           <a:p>
             <a:pPr lvl="4"/>
             <a:r>
-              <a:rPr lang="en-US" smtClean="0"/>
+              <a:rPr lang="en-US"/>
               <a:t>Fifth level</a:t>
             </a:r>
-            <a:endParaRPr lang="en-US"/>
           </a:p>
         </p:txBody>
       </p:sp>
@@ -2228,7 +2226,7 @@
           <a:p>
             <a:pPr lvl="0"/>
             <a:r>
-              <a:rPr lang="en-US" smtClean="0"/>
+              <a:rPr lang="en-US"/>
               <a:t>Click to edit Master text styles</a:t>
             </a:r>
           </a:p>
@@ -2252,7 +2250,7 @@
             <a:fld id="{1D8BD707-D9CF-40AE-B4C6-C98DA3205C09}" type="datetimeFigureOut">
               <a:rPr lang="en-US" smtClean="0"/>
               <a:pPr/>
-              <a:t>8/1/2011</a:t>
+              <a:t>6/3/2026</a:t>
             </a:fld>
             <a:endParaRPr lang="en-US"/>
           </a:p>
@@ -2351,10 +2349,9 @@
           </a:lstStyle>
           <a:p>
             <a:r>
-              <a:rPr lang="en-US" smtClean="0"/>
+              <a:rPr lang="en-US"/>
               <a:t>Click to edit Master title style</a:t>
             </a:r>
-            <a:endParaRPr lang="en-US"/>
           </a:p>
         </p:txBody>
       </p:sp>
@@ -2478,7 +2475,7 @@
           <a:p>
             <a:pPr lvl="0"/>
             <a:r>
-              <a:rPr lang="en-US" smtClean="0"/>
+              <a:rPr lang="en-US"/>
               <a:t>Click to edit Master text styles</a:t>
             </a:r>
           </a:p>
@@ -2502,7 +2499,7 @@
             <a:fld id="{1D8BD707-D9CF-40AE-B4C6-C98DA3205C09}" type="datetimeFigureOut">
               <a:rPr lang="en-US" smtClean="0"/>
               <a:pPr/>
-              <a:t>8/1/2011</a:t>
+              <a:t>6/3/2026</a:t>
             </a:fld>
             <a:endParaRPr lang="en-US"/>
           </a:p>
@@ -2607,10 +2604,9 @@
           <a:lstStyle/>
           <a:p>
             <a:r>
-              <a:rPr lang="en-US" smtClean="0"/>
+              <a:rPr lang="en-US"/>
               <a:t>Click to edit Master title style</a:t>
             </a:r>
-            <a:endParaRPr lang="en-US"/>
           </a:p>
         </p:txBody>
       </p:sp>
@@ -2641,38 +2637,37 @@
           <a:p>
             <a:pPr lvl="0"/>
             <a:r>
-              <a:rPr lang="en-US" smtClean="0"/>
+              <a:rPr lang="en-US"/>
               <a:t>Click to edit Master text styles</a:t>
             </a:r>
           </a:p>
           <a:p>
             <a:pPr lvl="1"/>
             <a:r>
-              <a:rPr lang="en-US" smtClean="0"/>
+              <a:rPr lang="en-US"/>
               <a:t>Second level</a:t>
             </a:r>
           </a:p>
           <a:p>
             <a:pPr lvl="2"/>
             <a:r>
-              <a:rPr lang="en-US" smtClean="0"/>
+              <a:rPr lang="en-US"/>
               <a:t>Third level</a:t>
             </a:r>
           </a:p>
           <a:p>
             <a:pPr lvl="3"/>
             <a:r>
-              <a:rPr lang="en-US" smtClean="0"/>
+              <a:rPr lang="en-US"/>
               <a:t>Fourth level</a:t>
             </a:r>
           </a:p>
           <a:p>
             <a:pPr lvl="4"/>
             <a:r>
-              <a:rPr lang="en-US" smtClean="0"/>
+              <a:rPr lang="en-US"/>
               <a:t>Fifth level</a:t>
             </a:r>
-            <a:endParaRPr lang="en-US"/>
           </a:p>
         </p:txBody>
       </p:sp>
@@ -2712,7 +2707,7 @@
             <a:fld id="{1D8BD707-D9CF-40AE-B4C6-C98DA3205C09}" type="datetimeFigureOut">
               <a:rPr lang="en-US" smtClean="0"/>
               <a:pPr/>
-              <a:t>8/1/2011</a:t>
+              <a:t>6/3/2026</a:t>
             </a:fld>
             <a:endParaRPr lang="en-US"/>
           </a:p>
@@ -3067,7 +3062,7 @@
 </file>
 
 <file path=ppt/slides/slide1.xml><?xml version="1.0" encoding="utf-8"?>
-<p:sld xmlns:p="http://schemas.openxmlformats.org/presentationml/2006/main" xmlns:a="http://schemas.openxmlformats.org/drawingml/2006/main" xmlns:r="http://schemas.openxmlformats.org/officeDocument/2006/relationships">
+<p:sld xmlns:a="http://schemas.openxmlformats.org/drawingml/2006/main" xmlns:r="http://schemas.openxmlformats.org/officeDocument/2006/relationships" xmlns:p="http://schemas.openxmlformats.org/presentationml/2006/main">
   <p:cSld>
     <p:spTree>
       <p:nvGrpSpPr>
@@ -3085,12 +3080,12 @@
       </p:grpSpPr>
       <p:sp>
         <p:nvSpPr>
-          <p:cNvPr name="Freeform 2" id="2"/>
+          <p:cNvPr id="2" name="Freeform 2"/>
           <p:cNvSpPr/>
           <p:nvPr/>
         </p:nvSpPr>
         <p:spPr>
-          <a:xfrm flipH="false" flipV="false" rot="0">
+          <a:xfrm>
             <a:off x="0" y="0"/>
             <a:ext cx="18288000" cy="10287000"/>
           </a:xfrm>
@@ -3099,9 +3094,9 @@
             <a:gdLst/>
             <a:ahLst/>
             <a:cxnLst/>
-            <a:rect r="r" b="b" t="t" l="l"/>
+            <a:rect l="l" t="t" r="r" b="b"/>
             <a:pathLst>
-              <a:path h="10287000" w="18288000">
+              <a:path w="18288000" h="10287000">
                 <a:moveTo>
                   <a:pt x="0" y="0"/>
                 </a:moveTo>
@@ -3124,19 +3119,19 @@
           <a:blipFill>
             <a:blip r:embed="rId2"/>
             <a:stretch>
-              <a:fillRect l="-29412" t="0" r="0" b="-29412"/>
+              <a:fillRect l="-29412" b="-29412"/>
             </a:stretch>
           </a:blipFill>
         </p:spPr>
       </p:sp>
       <p:sp>
         <p:nvSpPr>
-          <p:cNvPr name="Freeform 3" id="3"/>
+          <p:cNvPr id="3" name="Freeform 3"/>
           <p:cNvSpPr/>
           <p:nvPr/>
         </p:nvSpPr>
         <p:spPr>
-          <a:xfrm flipH="false" flipV="false" rot="0">
+          <a:xfrm>
             <a:off x="-1756460" y="8867605"/>
             <a:ext cx="20044460" cy="2630835"/>
           </a:xfrm>
@@ -3145,9 +3140,9 @@
             <a:gdLst/>
             <a:ahLst/>
             <a:cxnLst/>
-            <a:rect r="r" b="b" t="t" l="l"/>
+            <a:rect l="l" t="t" r="r" b="b"/>
             <a:pathLst>
-              <a:path h="2630835" w="20044460">
+              <a:path w="20044460" h="2630835">
                 <a:moveTo>
                   <a:pt x="0" y="0"/>
                 </a:moveTo>
@@ -3168,8 +3163,113 @@
             </a:pathLst>
           </a:custGeom>
           <a:blipFill>
-            <a:blip r:embed="rId3">
+            <a:blip>
               <a:alphaModFix amt="9999"/>
+              <a:extLst>
+                <a:ext uri="{96DAC541-7B7A-43D3-8B79-37D633B846F1}">
+                  <asvg:svgBlip xmlns:asvg="http://schemas.microsoft.com/office/drawing/2016/SVG/main" r:embed="rId3"/>
+                </a:ext>
+              </a:extLst>
+            </a:blip>
+            <a:stretch>
+              <a:fillRect/>
+            </a:stretch>
+          </a:blipFill>
+        </p:spPr>
+      </p:sp>
+      <p:sp>
+        <p:nvSpPr>
+          <p:cNvPr id="4" name="Freeform 4"/>
+          <p:cNvSpPr/>
+          <p:nvPr/>
+        </p:nvSpPr>
+        <p:spPr>
+          <a:xfrm flipV="1">
+            <a:off x="0" y="-1315418"/>
+            <a:ext cx="20044460" cy="2630835"/>
+          </a:xfrm>
+          <a:custGeom>
+            <a:avLst/>
+            <a:gdLst/>
+            <a:ahLst/>
+            <a:cxnLst/>
+            <a:rect l="l" t="t" r="r" b="b"/>
+            <a:pathLst>
+              <a:path w="20044460" h="2630835">
+                <a:moveTo>
+                  <a:pt x="0" y="2630836"/>
+                </a:moveTo>
+                <a:lnTo>
+                  <a:pt x="20044460" y="2630836"/>
+                </a:lnTo>
+                <a:lnTo>
+                  <a:pt x="20044460" y="0"/>
+                </a:lnTo>
+                <a:lnTo>
+                  <a:pt x="0" y="0"/>
+                </a:lnTo>
+                <a:lnTo>
+                  <a:pt x="0" y="2630836"/>
+                </a:lnTo>
+                <a:close/>
+              </a:path>
+            </a:pathLst>
+          </a:custGeom>
+          <a:blipFill>
+            <a:blip>
+              <a:alphaModFix amt="9999"/>
+              <a:extLst>
+                <a:ext uri="{96DAC541-7B7A-43D3-8B79-37D633B846F1}">
+                  <asvg:svgBlip xmlns:asvg="http://schemas.microsoft.com/office/drawing/2016/SVG/main" r:embed="rId3"/>
+                </a:ext>
+              </a:extLst>
+            </a:blip>
+            <a:stretch>
+              <a:fillRect/>
+            </a:stretch>
+          </a:blipFill>
+        </p:spPr>
+      </p:sp>
+      <p:sp>
+        <p:nvSpPr>
+          <p:cNvPr id="5" name="Freeform 5"/>
+          <p:cNvSpPr/>
+          <p:nvPr/>
+        </p:nvSpPr>
+        <p:spPr>
+          <a:xfrm flipV="1">
+            <a:off x="11352291" y="-3270212"/>
+            <a:ext cx="6935709" cy="10106680"/>
+          </a:xfrm>
+          <a:custGeom>
+            <a:avLst/>
+            <a:gdLst/>
+            <a:ahLst/>
+            <a:cxnLst/>
+            <a:rect l="l" t="t" r="r" b="b"/>
+            <a:pathLst>
+              <a:path w="6935709" h="10106680">
+                <a:moveTo>
+                  <a:pt x="0" y="10106680"/>
+                </a:moveTo>
+                <a:lnTo>
+                  <a:pt x="6935709" y="10106680"/>
+                </a:lnTo>
+                <a:lnTo>
+                  <a:pt x="6935709" y="0"/>
+                </a:lnTo>
+                <a:lnTo>
+                  <a:pt x="0" y="0"/>
+                </a:lnTo>
+                <a:lnTo>
+                  <a:pt x="0" y="10106680"/>
+                </a:lnTo>
+                <a:close/>
+              </a:path>
+            </a:pathLst>
+          </a:custGeom>
+          <a:blipFill>
+            <a:blip>
               <a:extLst>
                 <a:ext uri="{96DAC541-7B7A-43D3-8B79-37D633B846F1}">
                   <asvg:svgBlip xmlns:asvg="http://schemas.microsoft.com/office/drawing/2016/SVG/main" r:embed="rId4"/>
@@ -3177,52 +3277,51 @@
               </a:extLst>
             </a:blip>
             <a:stretch>
-              <a:fillRect l="0" t="0" r="0" b="0"/>
+              <a:fillRect/>
             </a:stretch>
           </a:blipFill>
         </p:spPr>
       </p:sp>
       <p:sp>
         <p:nvSpPr>
-          <p:cNvPr name="Freeform 4" id="4"/>
+          <p:cNvPr id="6" name="Freeform 6"/>
           <p:cNvSpPr/>
           <p:nvPr/>
         </p:nvSpPr>
         <p:spPr>
-          <a:xfrm flipH="false" flipV="true" rot="0">
-            <a:off x="0" y="-1315418"/>
-            <a:ext cx="20044460" cy="2630835"/>
+          <a:xfrm>
+            <a:off x="11352291" y="3450532"/>
+            <a:ext cx="6935709" cy="10106680"/>
           </a:xfrm>
           <a:custGeom>
             <a:avLst/>
             <a:gdLst/>
             <a:ahLst/>
             <a:cxnLst/>
-            <a:rect r="r" b="b" t="t" l="l"/>
+            <a:rect l="l" t="t" r="r" b="b"/>
             <a:pathLst>
-              <a:path h="2630835" w="20044460">
+              <a:path w="6935709" h="10106680">
                 <a:moveTo>
-                  <a:pt x="0" y="2630836"/>
+                  <a:pt x="0" y="0"/>
                 </a:moveTo>
                 <a:lnTo>
-                  <a:pt x="20044460" y="2630836"/>
-                </a:lnTo>
-                <a:lnTo>
-                  <a:pt x="20044460" y="0"/>
+                  <a:pt x="6935709" y="0"/>
+                </a:lnTo>
+                <a:lnTo>
+                  <a:pt x="6935709" y="10106680"/>
+                </a:lnTo>
+                <a:lnTo>
+                  <a:pt x="0" y="10106680"/>
                 </a:lnTo>
                 <a:lnTo>
                   <a:pt x="0" y="0"/>
-                </a:lnTo>
-                <a:lnTo>
-                  <a:pt x="0" y="2630836"/>
                 </a:lnTo>
                 <a:close/>
               </a:path>
             </a:pathLst>
           </a:custGeom>
           <a:blipFill>
-            <a:blip r:embed="rId3">
-              <a:alphaModFix amt="9999"/>
+            <a:blip>
               <a:extLst>
                 <a:ext uri="{96DAC541-7B7A-43D3-8B79-37D633B846F1}">
                   <asvg:svgBlip xmlns:asvg="http://schemas.microsoft.com/office/drawing/2016/SVG/main" r:embed="rId4"/>
@@ -3230,93 +3329,87 @@
               </a:extLst>
             </a:blip>
             <a:stretch>
-              <a:fillRect l="0" t="0" r="0" b="0"/>
+              <a:fillRect/>
             </a:stretch>
           </a:blipFill>
         </p:spPr>
       </p:sp>
       <p:sp>
         <p:nvSpPr>
-          <p:cNvPr name="Freeform 5" id="5"/>
+          <p:cNvPr id="7" name="Freeform 7"/>
           <p:cNvSpPr/>
           <p:nvPr/>
         </p:nvSpPr>
         <p:spPr>
-          <a:xfrm flipH="false" flipV="true" rot="0">
-            <a:off x="11352291" y="-3270212"/>
-            <a:ext cx="6935709" cy="10106680"/>
+          <a:xfrm>
+            <a:off x="13202147" y="8862843"/>
+            <a:ext cx="4448189" cy="722831"/>
           </a:xfrm>
           <a:custGeom>
             <a:avLst/>
             <a:gdLst/>
             <a:ahLst/>
             <a:cxnLst/>
-            <a:rect r="r" b="b" t="t" l="l"/>
+            <a:rect l="l" t="t" r="r" b="b"/>
             <a:pathLst>
-              <a:path h="10106680" w="6935709">
+              <a:path w="4448189" h="722831">
                 <a:moveTo>
-                  <a:pt x="0" y="10106680"/>
+                  <a:pt x="0" y="0"/>
                 </a:moveTo>
                 <a:lnTo>
-                  <a:pt x="6935709" y="10106680"/>
-                </a:lnTo>
-                <a:lnTo>
-                  <a:pt x="6935709" y="0"/>
+                  <a:pt x="4448189" y="0"/>
+                </a:lnTo>
+                <a:lnTo>
+                  <a:pt x="4448189" y="722830"/>
+                </a:lnTo>
+                <a:lnTo>
+                  <a:pt x="0" y="722830"/>
                 </a:lnTo>
                 <a:lnTo>
                   <a:pt x="0" y="0"/>
-                </a:lnTo>
-                <a:lnTo>
-                  <a:pt x="0" y="10106680"/>
                 </a:lnTo>
                 <a:close/>
               </a:path>
             </a:pathLst>
           </a:custGeom>
           <a:blipFill>
-            <a:blip r:embed="rId5">
-              <a:extLst>
-                <a:ext uri="{96DAC541-7B7A-43D3-8B79-37D633B846F1}">
-                  <asvg:svgBlip xmlns:asvg="http://schemas.microsoft.com/office/drawing/2016/SVG/main" r:embed="rId6"/>
-                </a:ext>
-              </a:extLst>
-            </a:blip>
+            <a:blip r:embed="rId5"/>
             <a:stretch>
-              <a:fillRect l="0" t="0" r="0" b="0"/>
+              <a:fillRect/>
             </a:stretch>
           </a:blipFill>
         </p:spPr>
       </p:sp>
       <p:sp>
         <p:nvSpPr>
-          <p:cNvPr name="Freeform 6" id="6"/>
+          <p:cNvPr id="8" name="Freeform 8"/>
           <p:cNvSpPr/>
           <p:nvPr/>
         </p:nvSpPr>
         <p:spPr>
-          <a:xfrm flipH="false" flipV="false" rot="0">
-            <a:off x="11352291" y="3450532"/>
-            <a:ext cx="6935709" cy="10106680"/>
+          <a:xfrm rot="-10800000">
+            <a:off x="13202147" y="701327"/>
+            <a:ext cx="4448189" cy="722831"/>
           </a:xfrm>
           <a:custGeom>
             <a:avLst/>
             <a:gdLst/>
             <a:ahLst/>
             <a:cxnLst/>
-            <a:rect r="r" b="b" t="t" l="l"/>
+            <a:rect l="l" t="t" r="r" b="b"/>
             <a:pathLst>
-              <a:path h="10106680" w="6935709">
+              <a:path w="4448189" h="722831">
                 <a:moveTo>
                   <a:pt x="0" y="0"/>
                 </a:moveTo>
                 <a:lnTo>
-                  <a:pt x="6935709" y="0"/>
-                </a:lnTo>
-                <a:lnTo>
-                  <a:pt x="6935709" y="10106680"/>
-                </a:lnTo>
-                <a:lnTo>
-                  <a:pt x="0" y="10106680"/>
+                  <a:pt x="4448189" y="0"/>
+                </a:lnTo>
+                <a:lnTo>
+                  <a:pt x="4448189" y="722830"/>
+                </a:lnTo>
+                <a:lnTo>
+                  <a:pt x="0" y="722830"/>
                 </a:lnTo>
                 <a:lnTo>
                   <a:pt x="0" y="0"/>
@@ -3326,119 +3419,21 @@
             </a:pathLst>
           </a:custGeom>
           <a:blipFill>
-            <a:blip r:embed="rId5">
-              <a:extLst>
-                <a:ext uri="{96DAC541-7B7A-43D3-8B79-37D633B846F1}">
-                  <asvg:svgBlip xmlns:asvg="http://schemas.microsoft.com/office/drawing/2016/SVG/main" r:embed="rId6"/>
-                </a:ext>
-              </a:extLst>
-            </a:blip>
+            <a:blip r:embed="rId5"/>
             <a:stretch>
-              <a:fillRect l="0" t="0" r="0" b="0"/>
+              <a:fillRect/>
             </a:stretch>
           </a:blipFill>
         </p:spPr>
       </p:sp>
-      <p:sp>
-        <p:nvSpPr>
-          <p:cNvPr name="Freeform 7" id="7"/>
-          <p:cNvSpPr/>
-          <p:nvPr/>
-        </p:nvSpPr>
-        <p:spPr>
-          <a:xfrm flipH="false" flipV="false" rot="0">
-            <a:off x="13202147" y="8862843"/>
-            <a:ext cx="4448189" cy="722831"/>
-          </a:xfrm>
-          <a:custGeom>
-            <a:avLst/>
-            <a:gdLst/>
-            <a:ahLst/>
-            <a:cxnLst/>
-            <a:rect r="r" b="b" t="t" l="l"/>
-            <a:pathLst>
-              <a:path h="722831" w="4448189">
-                <a:moveTo>
-                  <a:pt x="0" y="0"/>
-                </a:moveTo>
-                <a:lnTo>
-                  <a:pt x="4448189" y="0"/>
-                </a:lnTo>
-                <a:lnTo>
-                  <a:pt x="4448189" y="722830"/>
-                </a:lnTo>
-                <a:lnTo>
-                  <a:pt x="0" y="722830"/>
-                </a:lnTo>
-                <a:lnTo>
-                  <a:pt x="0" y="0"/>
-                </a:lnTo>
-                <a:close/>
-              </a:path>
-            </a:pathLst>
-          </a:custGeom>
-          <a:blipFill>
-            <a:blip r:embed="rId7"/>
-            <a:stretch>
-              <a:fillRect l="0" t="0" r="0" b="0"/>
-            </a:stretch>
-          </a:blipFill>
-        </p:spPr>
-      </p:sp>
-      <p:sp>
-        <p:nvSpPr>
-          <p:cNvPr name="Freeform 8" id="8"/>
-          <p:cNvSpPr/>
-          <p:nvPr/>
-        </p:nvSpPr>
-        <p:spPr>
-          <a:xfrm flipH="false" flipV="false" rot="-10800000">
-            <a:off x="13202147" y="701327"/>
-            <a:ext cx="4448189" cy="722831"/>
-          </a:xfrm>
-          <a:custGeom>
-            <a:avLst/>
-            <a:gdLst/>
-            <a:ahLst/>
-            <a:cxnLst/>
-            <a:rect r="r" b="b" t="t" l="l"/>
-            <a:pathLst>
-              <a:path h="722831" w="4448189">
-                <a:moveTo>
-                  <a:pt x="0" y="0"/>
-                </a:moveTo>
-                <a:lnTo>
-                  <a:pt x="4448189" y="0"/>
-                </a:lnTo>
-                <a:lnTo>
-                  <a:pt x="4448189" y="722830"/>
-                </a:lnTo>
-                <a:lnTo>
-                  <a:pt x="0" y="722830"/>
-                </a:lnTo>
-                <a:lnTo>
-                  <a:pt x="0" y="0"/>
-                </a:lnTo>
-                <a:close/>
-              </a:path>
-            </a:pathLst>
-          </a:custGeom>
-          <a:blipFill>
-            <a:blip r:embed="rId7"/>
-            <a:stretch>
-              <a:fillRect l="0" t="0" r="0" b="0"/>
-            </a:stretch>
-          </a:blipFill>
-        </p:spPr>
-      </p:sp>
       <p:grpSp>
         <p:nvGrpSpPr>
-          <p:cNvPr name="Group 9" id="9"/>
+          <p:cNvPr id="9" name="Group 9"/>
           <p:cNvGrpSpPr/>
           <p:nvPr/>
         </p:nvGrpSpPr>
         <p:grpSpPr>
-          <a:xfrm rot="0">
+          <a:xfrm>
             <a:off x="11025343" y="1361478"/>
             <a:ext cx="8801797" cy="7564044"/>
             <a:chOff x="0" y="0"/>
@@ -3447,12 +3442,12 @@
         </p:grpSpPr>
         <p:sp>
           <p:nvSpPr>
-            <p:cNvPr name="Freeform 10" id="10"/>
+            <p:cNvPr id="10" name="Freeform 10"/>
             <p:cNvSpPr/>
             <p:nvPr/>
           </p:nvSpPr>
           <p:spPr>
-            <a:xfrm flipH="false" flipV="false" rot="0">
+            <a:xfrm>
               <a:off x="0" y="0"/>
               <a:ext cx="812800" cy="698500"/>
             </a:xfrm>
@@ -3461,9 +3456,9 @@
               <a:gdLst/>
               <a:ahLst/>
               <a:cxnLst/>
-              <a:rect r="r" b="b" t="t" l="l"/>
+              <a:rect l="l" t="t" r="r" b="b"/>
               <a:pathLst>
-                <a:path h="698500" w="812800">
+                <a:path w="812800" h="698500">
                   <a:moveTo>
                     <a:pt x="812800" y="349250"/>
                   </a:moveTo>
@@ -3496,8 +3491,8 @@
         </p:sp>
         <p:sp>
           <p:nvSpPr>
-            <p:cNvPr name="TextBox 11" id="11"/>
-            <p:cNvSpPr txBox="true"/>
+            <p:cNvPr id="11" name="TextBox 11"/>
+            <p:cNvSpPr txBox="1"/>
             <p:nvPr/>
           </p:nvSpPr>
           <p:spPr>
@@ -3510,7 +3505,7 @@
             </a:prstGeom>
           </p:spPr>
           <p:txBody>
-            <a:bodyPr anchor="ctr" rtlCol="false" tIns="50800" lIns="50800" bIns="50800" rIns="50800"/>
+            <a:bodyPr lIns="50800" tIns="50800" rIns="50800" bIns="50800" rtlCol="0" anchor="ctr"/>
             <a:lstStyle/>
             <a:p>
               <a:pPr algn="ctr">
@@ -3518,18 +3513,19 @@
                   <a:spcPts val="2659"/>
                 </a:lnSpc>
               </a:pPr>
+              <a:endParaRPr/>
             </a:p>
           </p:txBody>
         </p:sp>
       </p:grpSp>
       <p:grpSp>
         <p:nvGrpSpPr>
-          <p:cNvPr name="Group 12" id="12"/>
+          <p:cNvPr id="12" name="Group 12"/>
           <p:cNvGrpSpPr/>
           <p:nvPr/>
         </p:nvGrpSpPr>
         <p:grpSpPr>
-          <a:xfrm rot="0">
+          <a:xfrm>
             <a:off x="11547166" y="1783128"/>
             <a:ext cx="7758150" cy="6667161"/>
             <a:chOff x="0" y="0"/>
@@ -3538,12 +3534,12 @@
         </p:grpSpPr>
         <p:sp>
           <p:nvSpPr>
-            <p:cNvPr name="Freeform 13" id="13"/>
+            <p:cNvPr id="13" name="Freeform 13"/>
             <p:cNvSpPr/>
             <p:nvPr/>
           </p:nvSpPr>
           <p:spPr>
-            <a:xfrm flipH="false" flipV="false" rot="0">
+            <a:xfrm>
               <a:off x="0" y="0"/>
               <a:ext cx="812800" cy="698500"/>
             </a:xfrm>
@@ -3552,9 +3548,9 @@
               <a:gdLst/>
               <a:ahLst/>
               <a:cxnLst/>
-              <a:rect r="r" b="b" t="t" l="l"/>
+              <a:rect l="l" t="t" r="r" b="b"/>
               <a:pathLst>
-                <a:path h="698500" w="812800">
+                <a:path w="812800" h="698500">
                   <a:moveTo>
                     <a:pt x="812800" y="349250"/>
                   </a:moveTo>
@@ -3581,9 +3577,9 @@
               </a:pathLst>
             </a:custGeom>
             <a:blipFill>
-              <a:blip r:embed="rId8"/>
+              <a:blip r:embed="rId6"/>
               <a:stretch>
-                <a:fillRect l="-28986" t="0" r="0" b="0"/>
+                <a:fillRect l="-28986"/>
               </a:stretch>
             </a:blipFill>
           </p:spPr>
@@ -3591,12 +3587,12 @@
       </p:grpSp>
       <p:grpSp>
         <p:nvGrpSpPr>
-          <p:cNvPr name="Group 14" id="14"/>
+          <p:cNvPr id="14" name="Group 14"/>
           <p:cNvGrpSpPr/>
           <p:nvPr/>
         </p:nvGrpSpPr>
         <p:grpSpPr>
-          <a:xfrm rot="0">
+          <a:xfrm>
             <a:off x="1421409" y="8496130"/>
             <a:ext cx="8568916" cy="911580"/>
             <a:chOff x="0" y="0"/>
@@ -3605,12 +3601,12 @@
         </p:grpSpPr>
         <p:sp>
           <p:nvSpPr>
-            <p:cNvPr name="Freeform 15" id="15"/>
+            <p:cNvPr id="15" name="Freeform 15"/>
             <p:cNvSpPr/>
             <p:nvPr/>
           </p:nvSpPr>
           <p:spPr>
-            <a:xfrm flipH="false" flipV="false" rot="0">
+            <a:xfrm>
               <a:off x="0" y="0"/>
               <a:ext cx="901875" cy="95943"/>
             </a:xfrm>
@@ -3619,9 +3615,9 @@
               <a:gdLst/>
               <a:ahLst/>
               <a:cxnLst/>
-              <a:rect r="r" b="b" t="t" l="l"/>
+              <a:rect l="l" t="t" r="r" b="b"/>
               <a:pathLst>
-                <a:path h="95943" w="901875">
+                <a:path w="901875" h="95943">
                   <a:moveTo>
                     <a:pt x="0" y="0"/>
                   </a:moveTo>
@@ -3645,8 +3641,8 @@
         </p:sp>
         <p:sp>
           <p:nvSpPr>
-            <p:cNvPr name="TextBox 16" id="16"/>
-            <p:cNvSpPr txBox="true"/>
+            <p:cNvPr id="16" name="TextBox 16"/>
+            <p:cNvSpPr txBox="1"/>
             <p:nvPr/>
           </p:nvSpPr>
           <p:spPr>
@@ -3659,7 +3655,7 @@
             </a:prstGeom>
           </p:spPr>
           <p:txBody>
-            <a:bodyPr anchor="ctr" rtlCol="false" tIns="50800" lIns="50800" bIns="50800" rIns="50800"/>
+            <a:bodyPr lIns="50800" tIns="50800" rIns="50800" bIns="50800" rtlCol="0" anchor="ctr"/>
             <a:lstStyle/>
             <a:p>
               <a:pPr algn="ctr">
@@ -3667,18 +3663,19 @@
                   <a:spcPts val="2659"/>
                 </a:lnSpc>
               </a:pPr>
+              <a:endParaRPr/>
             </a:p>
           </p:txBody>
         </p:sp>
       </p:grpSp>
       <p:sp>
         <p:nvSpPr>
-          <p:cNvPr name="TextBox 17" id="17"/>
-          <p:cNvSpPr txBox="true"/>
+          <p:cNvPr id="17" name="TextBox 17"/>
+          <p:cNvSpPr txBox="1"/>
           <p:nvPr/>
         </p:nvSpPr>
         <p:spPr>
-          <a:xfrm rot="0">
+          <a:xfrm>
             <a:off x="1421409" y="2180161"/>
             <a:ext cx="9762695" cy="1547183"/>
           </a:xfrm>
@@ -3687,7 +3684,7 @@
           </a:prstGeom>
         </p:spPr>
         <p:txBody>
-          <a:bodyPr anchor="t" rtlCol="false" tIns="0" lIns="0" bIns="0" rIns="0">
+          <a:bodyPr lIns="0" tIns="0" rIns="0" bIns="0" rtlCol="0" anchor="t">
             <a:spAutoFit/>
           </a:bodyPr>
           <a:lstStyle/>
@@ -3717,21 +3714,21 @@
       </p:sp>
       <p:sp>
         <p:nvSpPr>
-          <p:cNvPr name="TextBox 18" id="18"/>
-          <p:cNvSpPr txBox="true"/>
+          <p:cNvPr id="18" name="TextBox 18"/>
+          <p:cNvSpPr txBox="1"/>
           <p:nvPr/>
         </p:nvSpPr>
         <p:spPr>
-          <a:xfrm rot="0">
+          <a:xfrm>
             <a:off x="1421409" y="8632680"/>
-            <a:ext cx="8568916" cy="625620"/>
+            <a:ext cx="8568916" cy="598112"/>
           </a:xfrm>
           <a:prstGeom prst="rect">
             <a:avLst/>
           </a:prstGeom>
         </p:spPr>
         <p:txBody>
-          <a:bodyPr anchor="t" rtlCol="false" tIns="0" lIns="0" bIns="0" rIns="0">
+          <a:bodyPr lIns="0" tIns="0" rIns="0" bIns="0" rtlCol="0" anchor="t">
             <a:spAutoFit/>
           </a:bodyPr>
           <a:lstStyle/>
@@ -3745,7 +3742,7 @@
               </a:spcBef>
             </a:pPr>
             <a:r>
-              <a:rPr lang="en-US" b="true" sz="3532" spc="-70">
+              <a:rPr lang="en-US" sz="3532" b="1" spc="-70" dirty="0">
                 <a:solidFill>
                   <a:srgbClr val="000000"/>
                 </a:solidFill>
@@ -3754,19 +3751,19 @@
                 <a:cs typeface="Poppins Semi-Bold"/>
                 <a:sym typeface="Poppins Semi-Bold"/>
               </a:rPr>
-              <a:t>PRESENTATION BY GROUP 6 | BSCS 1A</a:t>
+              <a:t>PRESENTATION BY GROUP 4 | BSCS 2D</a:t>
             </a:r>
           </a:p>
         </p:txBody>
       </p:sp>
       <p:sp>
         <p:nvSpPr>
-          <p:cNvPr name="TextBox 19" id="19"/>
-          <p:cNvSpPr txBox="true"/>
+          <p:cNvPr id="19" name="TextBox 19"/>
+          <p:cNvSpPr txBox="1"/>
           <p:nvPr/>
         </p:nvSpPr>
         <p:spPr>
-          <a:xfrm rot="0">
+          <a:xfrm>
             <a:off x="1421409" y="3660082"/>
             <a:ext cx="9603934" cy="4159036"/>
           </a:xfrm>
@@ -3775,7 +3772,7 @@
           </a:prstGeom>
         </p:spPr>
         <p:txBody>
-          <a:bodyPr anchor="t" rtlCol="false" tIns="0" lIns="0" bIns="0" rIns="0">
+          <a:bodyPr lIns="0" tIns="0" rIns="0" bIns="0" rtlCol="0" anchor="t">
             <a:spAutoFit/>
           </a:bodyPr>
           <a:lstStyle/>
@@ -3809,7 +3806,7 @@
 </file>
 
 <file path=ppt/slides/slide2.xml><?xml version="1.0" encoding="utf-8"?>
-<p:sld xmlns:p="http://schemas.openxmlformats.org/presentationml/2006/main" xmlns:a="http://schemas.openxmlformats.org/drawingml/2006/main" xmlns:r="http://schemas.openxmlformats.org/officeDocument/2006/relationships">
+<p:sld xmlns:a="http://schemas.openxmlformats.org/drawingml/2006/main" xmlns:r="http://schemas.openxmlformats.org/officeDocument/2006/relationships" xmlns:p="http://schemas.openxmlformats.org/presentationml/2006/main">
   <p:cSld>
     <p:spTree>
       <p:nvGrpSpPr>
@@ -3827,12 +3824,12 @@
       </p:grpSpPr>
       <p:sp>
         <p:nvSpPr>
-          <p:cNvPr name="Freeform 2" id="2"/>
+          <p:cNvPr id="2" name="Freeform 2"/>
           <p:cNvSpPr/>
           <p:nvPr/>
         </p:nvSpPr>
         <p:spPr>
-          <a:xfrm flipH="false" flipV="false" rot="0">
+          <a:xfrm>
             <a:off x="0" y="0"/>
             <a:ext cx="18288000" cy="10287000"/>
           </a:xfrm>
@@ -3841,9 +3838,9 @@
             <a:gdLst/>
             <a:ahLst/>
             <a:cxnLst/>
-            <a:rect r="r" b="b" t="t" l="l"/>
+            <a:rect l="l" t="t" r="r" b="b"/>
             <a:pathLst>
-              <a:path h="10287000" w="18288000">
+              <a:path w="18288000" h="10287000">
                 <a:moveTo>
                   <a:pt x="0" y="0"/>
                 </a:moveTo>
@@ -3866,19 +3863,19 @@
           <a:blipFill>
             <a:blip r:embed="rId2"/>
             <a:stretch>
-              <a:fillRect l="-29412" t="0" r="0" b="-29412"/>
+              <a:fillRect l="-29412" b="-29412"/>
             </a:stretch>
           </a:blipFill>
         </p:spPr>
       </p:sp>
       <p:sp>
         <p:nvSpPr>
-          <p:cNvPr name="Freeform 3" id="3"/>
+          <p:cNvPr id="3" name="Freeform 3"/>
           <p:cNvSpPr/>
           <p:nvPr/>
         </p:nvSpPr>
         <p:spPr>
-          <a:xfrm flipH="false" flipV="false" rot="0">
+          <a:xfrm>
             <a:off x="-1756460" y="8867605"/>
             <a:ext cx="20044460" cy="2630835"/>
           </a:xfrm>
@@ -3887,9 +3884,9 @@
             <a:gdLst/>
             <a:ahLst/>
             <a:cxnLst/>
-            <a:rect r="r" b="b" t="t" l="l"/>
+            <a:rect l="l" t="t" r="r" b="b"/>
             <a:pathLst>
-              <a:path h="2630835" w="20044460">
+              <a:path w="20044460" h="2630835">
                 <a:moveTo>
                   <a:pt x="0" y="0"/>
                 </a:moveTo>
@@ -3910,28 +3907,28 @@
             </a:pathLst>
           </a:custGeom>
           <a:blipFill>
-            <a:blip r:embed="rId3">
+            <a:blip>
               <a:alphaModFix amt="9999"/>
               <a:extLst>
                 <a:ext uri="{96DAC541-7B7A-43D3-8B79-37D633B846F1}">
-                  <asvg:svgBlip xmlns:asvg="http://schemas.microsoft.com/office/drawing/2016/SVG/main" r:embed="rId4"/>
+                  <asvg:svgBlip xmlns:asvg="http://schemas.microsoft.com/office/drawing/2016/SVG/main" r:embed="rId3"/>
                 </a:ext>
               </a:extLst>
             </a:blip>
             <a:stretch>
-              <a:fillRect l="0" t="0" r="0" b="0"/>
+              <a:fillRect/>
             </a:stretch>
           </a:blipFill>
         </p:spPr>
       </p:sp>
       <p:sp>
         <p:nvSpPr>
-          <p:cNvPr name="Freeform 4" id="4"/>
+          <p:cNvPr id="4" name="Freeform 4"/>
           <p:cNvSpPr/>
           <p:nvPr/>
         </p:nvSpPr>
         <p:spPr>
-          <a:xfrm flipH="false" flipV="true" rot="0">
+          <a:xfrm flipV="1">
             <a:off x="0" y="-1315418"/>
             <a:ext cx="20044460" cy="2630835"/>
           </a:xfrm>
@@ -3940,9 +3937,9 @@
             <a:gdLst/>
             <a:ahLst/>
             <a:cxnLst/>
-            <a:rect r="r" b="b" t="t" l="l"/>
+            <a:rect l="l" t="t" r="r" b="b"/>
             <a:pathLst>
-              <a:path h="2630835" w="20044460">
+              <a:path w="20044460" h="2630835">
                 <a:moveTo>
                   <a:pt x="0" y="2630836"/>
                 </a:moveTo>
@@ -3963,28 +3960,28 @@
             </a:pathLst>
           </a:custGeom>
           <a:blipFill>
-            <a:blip r:embed="rId3">
+            <a:blip>
               <a:alphaModFix amt="9999"/>
               <a:extLst>
                 <a:ext uri="{96DAC541-7B7A-43D3-8B79-37D633B846F1}">
-                  <asvg:svgBlip xmlns:asvg="http://schemas.microsoft.com/office/drawing/2016/SVG/main" r:embed="rId4"/>
+                  <asvg:svgBlip xmlns:asvg="http://schemas.microsoft.com/office/drawing/2016/SVG/main" r:embed="rId3"/>
                 </a:ext>
               </a:extLst>
             </a:blip>
             <a:stretch>
-              <a:fillRect l="0" t="0" r="0" b="0"/>
+              <a:fillRect/>
             </a:stretch>
           </a:blipFill>
         </p:spPr>
       </p:sp>
       <p:grpSp>
         <p:nvGrpSpPr>
-          <p:cNvPr name="Group 5" id="5"/>
+          <p:cNvPr id="5" name="Group 5"/>
           <p:cNvGrpSpPr/>
           <p:nvPr/>
         </p:nvGrpSpPr>
         <p:grpSpPr>
-          <a:xfrm rot="0">
+          <a:xfrm>
             <a:off x="1028700" y="3040136"/>
             <a:ext cx="16230600" cy="5827469"/>
             <a:chOff x="0" y="0"/>
@@ -3993,12 +3990,12 @@
         </p:grpSpPr>
         <p:sp>
           <p:nvSpPr>
-            <p:cNvPr name="Freeform 6" id="6"/>
+            <p:cNvPr id="6" name="Freeform 6"/>
             <p:cNvSpPr/>
             <p:nvPr/>
           </p:nvSpPr>
           <p:spPr>
-            <a:xfrm flipH="false" flipV="false" rot="0">
+            <a:xfrm>
               <a:off x="0" y="0"/>
               <a:ext cx="4394067" cy="1577655"/>
             </a:xfrm>
@@ -4007,9 +4004,9 @@
               <a:gdLst/>
               <a:ahLst/>
               <a:cxnLst/>
-              <a:rect r="r" b="b" t="t" l="l"/>
+              <a:rect l="l" t="t" r="r" b="b"/>
               <a:pathLst>
-                <a:path h="1577655" w="4394067">
+                <a:path w="4394067" h="1577655">
                   <a:moveTo>
                     <a:pt x="0" y="0"/>
                   </a:moveTo>
@@ -4033,8 +4030,8 @@
         </p:sp>
         <p:sp>
           <p:nvSpPr>
-            <p:cNvPr name="TextBox 7" id="7"/>
-            <p:cNvSpPr txBox="true"/>
+            <p:cNvPr id="7" name="TextBox 7"/>
+            <p:cNvSpPr txBox="1"/>
             <p:nvPr/>
           </p:nvSpPr>
           <p:spPr>
@@ -4047,7 +4044,7 @@
             </a:prstGeom>
           </p:spPr>
           <p:txBody>
-            <a:bodyPr anchor="ctr" rtlCol="false" tIns="50800" lIns="50800" bIns="50800" rIns="50800"/>
+            <a:bodyPr lIns="50800" tIns="50800" rIns="50800" bIns="50800" rtlCol="0" anchor="ctr"/>
             <a:lstStyle/>
             <a:p>
               <a:pPr algn="ctr">
@@ -4055,18 +4052,19 @@
                   <a:spcPts val="2659"/>
                 </a:lnSpc>
               </a:pPr>
+              <a:endParaRPr/>
             </a:p>
           </p:txBody>
         </p:sp>
       </p:grpSp>
       <p:sp>
         <p:nvSpPr>
-          <p:cNvPr name="TextBox 8" id="8"/>
-          <p:cNvSpPr txBox="true"/>
+          <p:cNvPr id="8" name="TextBox 8"/>
+          <p:cNvSpPr txBox="1"/>
           <p:nvPr/>
         </p:nvSpPr>
         <p:spPr>
-          <a:xfrm rot="0">
+          <a:xfrm>
             <a:off x="1459185" y="3182347"/>
             <a:ext cx="15369631" cy="5209178"/>
           </a:xfrm>
@@ -4075,7 +4073,7 @@
           </a:prstGeom>
         </p:spPr>
         <p:txBody>
-          <a:bodyPr anchor="t" rtlCol="false" tIns="0" lIns="0" bIns="0" rIns="0">
+          <a:bodyPr lIns="0" tIns="0" rIns="0" bIns="0" rtlCol="0" anchor="t">
             <a:spAutoFit/>
           </a:bodyPr>
           <a:lstStyle/>
@@ -4089,7 +4087,7 @@
               </a:spcBef>
             </a:pPr>
             <a:r>
-              <a:rPr lang="en-US" b="true" sz="4914">
+              <a:rPr lang="en-US" sz="4914" b="1">
                 <a:solidFill>
                   <a:srgbClr val="000000"/>
                 </a:solidFill>
@@ -4105,12 +4103,12 @@
       </p:sp>
       <p:sp>
         <p:nvSpPr>
-          <p:cNvPr name="TextBox 9" id="9"/>
-          <p:cNvSpPr txBox="true"/>
+          <p:cNvPr id="9" name="TextBox 9"/>
+          <p:cNvSpPr txBox="1"/>
           <p:nvPr/>
         </p:nvSpPr>
         <p:spPr>
-          <a:xfrm rot="0">
+          <a:xfrm>
             <a:off x="4138991" y="1163018"/>
             <a:ext cx="10010019" cy="1343286"/>
           </a:xfrm>
@@ -4119,7 +4117,7 @@
           </a:prstGeom>
         </p:spPr>
         <p:txBody>
-          <a:bodyPr anchor="t" rtlCol="false" tIns="0" lIns="0" bIns="0" rIns="0">
+          <a:bodyPr lIns="0" tIns="0" rIns="0" bIns="0" rtlCol="0" anchor="t">
             <a:spAutoFit/>
           </a:bodyPr>
           <a:lstStyle/>
@@ -4149,12 +4147,12 @@
       </p:sp>
       <p:sp>
         <p:nvSpPr>
-          <p:cNvPr name="Freeform 10" id="10"/>
+          <p:cNvPr id="10" name="Freeform 10"/>
           <p:cNvSpPr/>
           <p:nvPr/>
         </p:nvSpPr>
         <p:spPr>
-          <a:xfrm flipH="false" flipV="false" rot="-5400000">
+          <a:xfrm rot="-5400000">
             <a:off x="13505761" y="-2160696"/>
             <a:ext cx="3892438" cy="5672041"/>
           </a:xfrm>
@@ -4163,9 +4161,9 @@
             <a:gdLst/>
             <a:ahLst/>
             <a:cxnLst/>
-            <a:rect r="r" b="b" t="t" l="l"/>
+            <a:rect l="l" t="t" r="r" b="b"/>
             <a:pathLst>
-              <a:path h="5672041" w="3892438">
+              <a:path w="3892438" h="5672041">
                 <a:moveTo>
                   <a:pt x="0" y="0"/>
                 </a:moveTo>
@@ -4186,27 +4184,27 @@
             </a:pathLst>
           </a:custGeom>
           <a:blipFill>
-            <a:blip r:embed="rId5">
+            <a:blip>
               <a:extLst>
                 <a:ext uri="{96DAC541-7B7A-43D3-8B79-37D633B846F1}">
-                  <asvg:svgBlip xmlns:asvg="http://schemas.microsoft.com/office/drawing/2016/SVG/main" r:embed="rId6"/>
+                  <asvg:svgBlip xmlns:asvg="http://schemas.microsoft.com/office/drawing/2016/SVG/main" r:embed="rId4"/>
                 </a:ext>
               </a:extLst>
             </a:blip>
             <a:stretch>
-              <a:fillRect l="0" t="0" r="0" b="0"/>
+              <a:fillRect/>
             </a:stretch>
           </a:blipFill>
         </p:spPr>
       </p:sp>
       <p:sp>
         <p:nvSpPr>
-          <p:cNvPr name="Freeform 11" id="11"/>
+          <p:cNvPr id="11" name="Freeform 11"/>
           <p:cNvSpPr/>
           <p:nvPr/>
         </p:nvSpPr>
         <p:spPr>
-          <a:xfrm flipH="false" flipV="true" rot="-5400000">
+          <a:xfrm rot="-5400000" flipV="1">
             <a:off x="889801" y="-2160696"/>
             <a:ext cx="3892438" cy="5672041"/>
           </a:xfrm>
@@ -4215,9 +4213,9 @@
             <a:gdLst/>
             <a:ahLst/>
             <a:cxnLst/>
-            <a:rect r="r" b="b" t="t" l="l"/>
+            <a:rect l="l" t="t" r="r" b="b"/>
             <a:pathLst>
-              <a:path h="5672041" w="3892438">
+              <a:path w="3892438" h="5672041">
                 <a:moveTo>
                   <a:pt x="0" y="5672040"/>
                 </a:moveTo>
@@ -4238,27 +4236,27 @@
             </a:pathLst>
           </a:custGeom>
           <a:blipFill>
-            <a:blip r:embed="rId5">
+            <a:blip>
               <a:extLst>
                 <a:ext uri="{96DAC541-7B7A-43D3-8B79-37D633B846F1}">
-                  <asvg:svgBlip xmlns:asvg="http://schemas.microsoft.com/office/drawing/2016/SVG/main" r:embed="rId6"/>
+                  <asvg:svgBlip xmlns:asvg="http://schemas.microsoft.com/office/drawing/2016/SVG/main" r:embed="rId4"/>
                 </a:ext>
               </a:extLst>
             </a:blip>
             <a:stretch>
-              <a:fillRect l="0" t="0" r="0" b="0"/>
+              <a:fillRect/>
             </a:stretch>
           </a:blipFill>
         </p:spPr>
       </p:sp>
       <p:grpSp>
         <p:nvGrpSpPr>
-          <p:cNvPr name="Group 12" id="12"/>
+          <p:cNvPr id="12" name="Group 12"/>
           <p:cNvGrpSpPr/>
           <p:nvPr/>
         </p:nvGrpSpPr>
         <p:grpSpPr>
-          <a:xfrm rot="0">
+          <a:xfrm>
             <a:off x="0" y="9930289"/>
             <a:ext cx="18288000" cy="356711"/>
             <a:chOff x="0" y="0"/>
@@ -4267,12 +4265,12 @@
         </p:grpSpPr>
         <p:sp>
           <p:nvSpPr>
-            <p:cNvPr name="Freeform 13" id="13"/>
+            <p:cNvPr id="13" name="Freeform 13"/>
             <p:cNvSpPr/>
             <p:nvPr/>
           </p:nvSpPr>
           <p:spPr>
-            <a:xfrm flipH="false" flipV="false" rot="0">
+            <a:xfrm>
               <a:off x="0" y="0"/>
               <a:ext cx="4816592" cy="93949"/>
             </a:xfrm>
@@ -4281,9 +4279,9 @@
               <a:gdLst/>
               <a:ahLst/>
               <a:cxnLst/>
-              <a:rect r="r" b="b" t="t" l="l"/>
+              <a:rect l="l" t="t" r="r" b="b"/>
               <a:pathLst>
-                <a:path h="93949" w="4816592">
+                <a:path w="4816592" h="93949">
                   <a:moveTo>
                     <a:pt x="0" y="0"/>
                   </a:moveTo>
@@ -4307,8 +4305,8 @@
         </p:sp>
         <p:sp>
           <p:nvSpPr>
-            <p:cNvPr name="TextBox 14" id="14"/>
-            <p:cNvSpPr txBox="true"/>
+            <p:cNvPr id="14" name="TextBox 14"/>
+            <p:cNvSpPr txBox="1"/>
             <p:nvPr/>
           </p:nvSpPr>
           <p:spPr>
@@ -4321,7 +4319,7 @@
             </a:prstGeom>
           </p:spPr>
           <p:txBody>
-            <a:bodyPr anchor="ctr" rtlCol="false" tIns="50800" lIns="50800" bIns="50800" rIns="50800"/>
+            <a:bodyPr lIns="50800" tIns="50800" rIns="50800" bIns="50800" rtlCol="0" anchor="ctr"/>
             <a:lstStyle/>
             <a:p>
               <a:pPr algn="ctr">
@@ -4329,6 +4327,7 @@
                   <a:spcPts val="2659"/>
                 </a:lnSpc>
               </a:pPr>
+              <a:endParaRPr/>
             </a:p>
           </p:txBody>
         </p:sp>
@@ -4342,7 +4341,7 @@
 </file>
 
 <file path=ppt/slides/slide3.xml><?xml version="1.0" encoding="utf-8"?>
-<p:sld xmlns:p="http://schemas.openxmlformats.org/presentationml/2006/main" xmlns:a="http://schemas.openxmlformats.org/drawingml/2006/main" xmlns:r="http://schemas.openxmlformats.org/officeDocument/2006/relationships">
+<p:sld xmlns:a="http://schemas.openxmlformats.org/drawingml/2006/main" xmlns:r="http://schemas.openxmlformats.org/officeDocument/2006/relationships" xmlns:p="http://schemas.openxmlformats.org/presentationml/2006/main">
   <p:cSld>
     <p:spTree>
       <p:nvGrpSpPr>
@@ -4360,12 +4359,12 @@
       </p:grpSpPr>
       <p:sp>
         <p:nvSpPr>
-          <p:cNvPr name="Freeform 2" id="2"/>
+          <p:cNvPr id="2" name="Freeform 2"/>
           <p:cNvSpPr/>
           <p:nvPr/>
         </p:nvSpPr>
         <p:spPr>
-          <a:xfrm flipH="false" flipV="false" rot="0">
+          <a:xfrm>
             <a:off x="0" y="0"/>
             <a:ext cx="18288000" cy="10287000"/>
           </a:xfrm>
@@ -4374,9 +4373,9 @@
             <a:gdLst/>
             <a:ahLst/>
             <a:cxnLst/>
-            <a:rect r="r" b="b" t="t" l="l"/>
+            <a:rect l="l" t="t" r="r" b="b"/>
             <a:pathLst>
-              <a:path h="10287000" w="18288000">
+              <a:path w="18288000" h="10287000">
                 <a:moveTo>
                   <a:pt x="0" y="0"/>
                 </a:moveTo>
@@ -4399,19 +4398,19 @@
           <a:blipFill>
             <a:blip r:embed="rId2"/>
             <a:stretch>
-              <a:fillRect l="-29412" t="0" r="0" b="-29412"/>
+              <a:fillRect l="-29412" b="-29412"/>
             </a:stretch>
           </a:blipFill>
         </p:spPr>
       </p:sp>
       <p:sp>
         <p:nvSpPr>
-          <p:cNvPr name="Freeform 3" id="3"/>
+          <p:cNvPr id="3" name="Freeform 3"/>
           <p:cNvSpPr/>
           <p:nvPr/>
         </p:nvSpPr>
         <p:spPr>
-          <a:xfrm flipH="false" flipV="false" rot="0">
+          <a:xfrm>
             <a:off x="-1756460" y="8867605"/>
             <a:ext cx="20044460" cy="2630835"/>
           </a:xfrm>
@@ -4420,9 +4419,9 @@
             <a:gdLst/>
             <a:ahLst/>
             <a:cxnLst/>
-            <a:rect r="r" b="b" t="t" l="l"/>
+            <a:rect l="l" t="t" r="r" b="b"/>
             <a:pathLst>
-              <a:path h="2630835" w="20044460">
+              <a:path w="20044460" h="2630835">
                 <a:moveTo>
                   <a:pt x="0" y="0"/>
                 </a:moveTo>
@@ -4443,28 +4442,28 @@
             </a:pathLst>
           </a:custGeom>
           <a:blipFill>
-            <a:blip r:embed="rId3">
+            <a:blip>
               <a:alphaModFix amt="9999"/>
               <a:extLst>
                 <a:ext uri="{96DAC541-7B7A-43D3-8B79-37D633B846F1}">
-                  <asvg:svgBlip xmlns:asvg="http://schemas.microsoft.com/office/drawing/2016/SVG/main" r:embed="rId4"/>
+                  <asvg:svgBlip xmlns:asvg="http://schemas.microsoft.com/office/drawing/2016/SVG/main" r:embed="rId3"/>
                 </a:ext>
               </a:extLst>
             </a:blip>
             <a:stretch>
-              <a:fillRect l="0" t="0" r="0" b="0"/>
+              <a:fillRect/>
             </a:stretch>
           </a:blipFill>
         </p:spPr>
       </p:sp>
       <p:sp>
         <p:nvSpPr>
-          <p:cNvPr name="Freeform 4" id="4"/>
+          <p:cNvPr id="4" name="Freeform 4"/>
           <p:cNvSpPr/>
           <p:nvPr/>
         </p:nvSpPr>
         <p:spPr>
-          <a:xfrm flipH="false" flipV="true" rot="0">
+          <a:xfrm flipV="1">
             <a:off x="0" y="-1315418"/>
             <a:ext cx="20044460" cy="2630835"/>
           </a:xfrm>
@@ -4473,9 +4472,9 @@
             <a:gdLst/>
             <a:ahLst/>
             <a:cxnLst/>
-            <a:rect r="r" b="b" t="t" l="l"/>
+            <a:rect l="l" t="t" r="r" b="b"/>
             <a:pathLst>
-              <a:path h="2630835" w="20044460">
+              <a:path w="20044460" h="2630835">
                 <a:moveTo>
                   <a:pt x="0" y="2630836"/>
                 </a:moveTo>
@@ -4496,28 +4495,28 @@
             </a:pathLst>
           </a:custGeom>
           <a:blipFill>
-            <a:blip r:embed="rId3">
+            <a:blip>
               <a:alphaModFix amt="9999"/>
               <a:extLst>
                 <a:ext uri="{96DAC541-7B7A-43D3-8B79-37D633B846F1}">
-                  <asvg:svgBlip xmlns:asvg="http://schemas.microsoft.com/office/drawing/2016/SVG/main" r:embed="rId4"/>
+                  <asvg:svgBlip xmlns:asvg="http://schemas.microsoft.com/office/drawing/2016/SVG/main" r:embed="rId3"/>
                 </a:ext>
               </a:extLst>
             </a:blip>
             <a:stretch>
-              <a:fillRect l="0" t="0" r="0" b="0"/>
+              <a:fillRect/>
             </a:stretch>
           </a:blipFill>
         </p:spPr>
       </p:sp>
       <p:grpSp>
         <p:nvGrpSpPr>
-          <p:cNvPr name="Group 5" id="5"/>
+          <p:cNvPr id="5" name="Group 5"/>
           <p:cNvGrpSpPr/>
           <p:nvPr/>
         </p:nvGrpSpPr>
         <p:grpSpPr>
-          <a:xfrm rot="0">
+          <a:xfrm>
             <a:off x="1028700" y="3040136"/>
             <a:ext cx="16230600" cy="5827469"/>
             <a:chOff x="0" y="0"/>
@@ -4526,12 +4525,12 @@
         </p:grpSpPr>
         <p:sp>
           <p:nvSpPr>
-            <p:cNvPr name="Freeform 6" id="6"/>
+            <p:cNvPr id="6" name="Freeform 6"/>
             <p:cNvSpPr/>
             <p:nvPr/>
           </p:nvSpPr>
           <p:spPr>
-            <a:xfrm flipH="false" flipV="false" rot="0">
+            <a:xfrm>
               <a:off x="0" y="0"/>
               <a:ext cx="4394067" cy="1577655"/>
             </a:xfrm>
@@ -4540,9 +4539,9 @@
               <a:gdLst/>
               <a:ahLst/>
               <a:cxnLst/>
-              <a:rect r="r" b="b" t="t" l="l"/>
+              <a:rect l="l" t="t" r="r" b="b"/>
               <a:pathLst>
-                <a:path h="1577655" w="4394067">
+                <a:path w="4394067" h="1577655">
                   <a:moveTo>
                     <a:pt x="0" y="0"/>
                   </a:moveTo>
@@ -4566,8 +4565,8 @@
         </p:sp>
         <p:sp>
           <p:nvSpPr>
-            <p:cNvPr name="TextBox 7" id="7"/>
-            <p:cNvSpPr txBox="true"/>
+            <p:cNvPr id="7" name="TextBox 7"/>
+            <p:cNvSpPr txBox="1"/>
             <p:nvPr/>
           </p:nvSpPr>
           <p:spPr>
@@ -4580,7 +4579,7 @@
             </a:prstGeom>
           </p:spPr>
           <p:txBody>
-            <a:bodyPr anchor="ctr" rtlCol="false" tIns="50800" lIns="50800" bIns="50800" rIns="50800"/>
+            <a:bodyPr lIns="50800" tIns="50800" rIns="50800" bIns="50800" rtlCol="0" anchor="ctr"/>
             <a:lstStyle/>
             <a:p>
               <a:pPr algn="ctr">
@@ -4588,18 +4587,19 @@
                   <a:spcPts val="2659"/>
                 </a:lnSpc>
               </a:pPr>
+              <a:endParaRPr/>
             </a:p>
           </p:txBody>
         </p:sp>
       </p:grpSp>
       <p:sp>
         <p:nvSpPr>
-          <p:cNvPr name="TextBox 8" id="8"/>
-          <p:cNvSpPr txBox="true"/>
+          <p:cNvPr id="8" name="TextBox 8"/>
+          <p:cNvSpPr txBox="1"/>
           <p:nvPr/>
         </p:nvSpPr>
         <p:spPr>
-          <a:xfrm rot="0">
+          <a:xfrm>
             <a:off x="1459185" y="3182347"/>
             <a:ext cx="15369631" cy="5209178"/>
           </a:xfrm>
@@ -4608,7 +4608,7 @@
           </a:prstGeom>
         </p:spPr>
         <p:txBody>
-          <a:bodyPr anchor="t" rtlCol="false" tIns="0" lIns="0" bIns="0" rIns="0">
+          <a:bodyPr lIns="0" tIns="0" rIns="0" bIns="0" rtlCol="0" anchor="t">
             <a:spAutoFit/>
           </a:bodyPr>
           <a:lstStyle/>
@@ -4622,7 +4622,7 @@
               </a:spcBef>
             </a:pPr>
             <a:r>
-              <a:rPr lang="en-US" b="true" sz="4914">
+              <a:rPr lang="en-US" sz="4914" b="1">
                 <a:solidFill>
                   <a:srgbClr val="000000"/>
                 </a:solidFill>
@@ -4638,12 +4638,12 @@
       </p:sp>
       <p:sp>
         <p:nvSpPr>
-          <p:cNvPr name="TextBox 9" id="9"/>
-          <p:cNvSpPr txBox="true"/>
+          <p:cNvPr id="9" name="TextBox 9"/>
+          <p:cNvSpPr txBox="1"/>
           <p:nvPr/>
         </p:nvSpPr>
         <p:spPr>
-          <a:xfrm rot="0">
+          <a:xfrm>
             <a:off x="4138991" y="1163018"/>
             <a:ext cx="10010019" cy="1343286"/>
           </a:xfrm>
@@ -4652,7 +4652,7 @@
           </a:prstGeom>
         </p:spPr>
         <p:txBody>
-          <a:bodyPr anchor="t" rtlCol="false" tIns="0" lIns="0" bIns="0" rIns="0">
+          <a:bodyPr lIns="0" tIns="0" rIns="0" bIns="0" rtlCol="0" anchor="t">
             <a:spAutoFit/>
           </a:bodyPr>
           <a:lstStyle/>
@@ -4682,12 +4682,12 @@
       </p:sp>
       <p:sp>
         <p:nvSpPr>
-          <p:cNvPr name="Freeform 10" id="10"/>
+          <p:cNvPr id="10" name="Freeform 10"/>
           <p:cNvSpPr/>
           <p:nvPr/>
         </p:nvSpPr>
         <p:spPr>
-          <a:xfrm flipH="false" flipV="false" rot="-5400000">
+          <a:xfrm rot="-5400000">
             <a:off x="13505761" y="-2160696"/>
             <a:ext cx="3892438" cy="5672041"/>
           </a:xfrm>
@@ -4696,9 +4696,9 @@
             <a:gdLst/>
             <a:ahLst/>
             <a:cxnLst/>
-            <a:rect r="r" b="b" t="t" l="l"/>
+            <a:rect l="l" t="t" r="r" b="b"/>
             <a:pathLst>
-              <a:path h="5672041" w="3892438">
+              <a:path w="3892438" h="5672041">
                 <a:moveTo>
                   <a:pt x="0" y="0"/>
                 </a:moveTo>
@@ -4719,27 +4719,27 @@
             </a:pathLst>
           </a:custGeom>
           <a:blipFill>
-            <a:blip r:embed="rId5">
+            <a:blip>
               <a:extLst>
                 <a:ext uri="{96DAC541-7B7A-43D3-8B79-37D633B846F1}">
-                  <asvg:svgBlip xmlns:asvg="http://schemas.microsoft.com/office/drawing/2016/SVG/main" r:embed="rId6"/>
+                  <asvg:svgBlip xmlns:asvg="http://schemas.microsoft.com/office/drawing/2016/SVG/main" r:embed="rId4"/>
                 </a:ext>
               </a:extLst>
             </a:blip>
             <a:stretch>
-              <a:fillRect l="0" t="0" r="0" b="0"/>
+              <a:fillRect/>
             </a:stretch>
           </a:blipFill>
         </p:spPr>
       </p:sp>
       <p:sp>
         <p:nvSpPr>
-          <p:cNvPr name="Freeform 11" id="11"/>
+          <p:cNvPr id="11" name="Freeform 11"/>
           <p:cNvSpPr/>
           <p:nvPr/>
         </p:nvSpPr>
         <p:spPr>
-          <a:xfrm flipH="false" flipV="true" rot="-5400000">
+          <a:xfrm rot="-5400000" flipV="1">
             <a:off x="889801" y="-2160696"/>
             <a:ext cx="3892438" cy="5672041"/>
           </a:xfrm>
@@ -4748,9 +4748,9 @@
             <a:gdLst/>
             <a:ahLst/>
             <a:cxnLst/>
-            <a:rect r="r" b="b" t="t" l="l"/>
+            <a:rect l="l" t="t" r="r" b="b"/>
             <a:pathLst>
-              <a:path h="5672041" w="3892438">
+              <a:path w="3892438" h="5672041">
                 <a:moveTo>
                   <a:pt x="0" y="5672040"/>
                 </a:moveTo>
@@ -4771,27 +4771,27 @@
             </a:pathLst>
           </a:custGeom>
           <a:blipFill>
-            <a:blip r:embed="rId5">
+            <a:blip>
               <a:extLst>
                 <a:ext uri="{96DAC541-7B7A-43D3-8B79-37D633B846F1}">
-                  <asvg:svgBlip xmlns:asvg="http://schemas.microsoft.com/office/drawing/2016/SVG/main" r:embed="rId6"/>
+                  <asvg:svgBlip xmlns:asvg="http://schemas.microsoft.com/office/drawing/2016/SVG/main" r:embed="rId4"/>
                 </a:ext>
               </a:extLst>
             </a:blip>
             <a:stretch>
-              <a:fillRect l="0" t="0" r="0" b="0"/>
+              <a:fillRect/>
             </a:stretch>
           </a:blipFill>
         </p:spPr>
       </p:sp>
       <p:grpSp>
         <p:nvGrpSpPr>
-          <p:cNvPr name="Group 12" id="12"/>
+          <p:cNvPr id="12" name="Group 12"/>
           <p:cNvGrpSpPr/>
           <p:nvPr/>
         </p:nvGrpSpPr>
         <p:grpSpPr>
-          <a:xfrm rot="0">
+          <a:xfrm>
             <a:off x="0" y="9930289"/>
             <a:ext cx="18288000" cy="356711"/>
             <a:chOff x="0" y="0"/>
@@ -4800,12 +4800,12 @@
         </p:grpSpPr>
         <p:sp>
           <p:nvSpPr>
-            <p:cNvPr name="Freeform 13" id="13"/>
+            <p:cNvPr id="13" name="Freeform 13"/>
             <p:cNvSpPr/>
             <p:nvPr/>
           </p:nvSpPr>
           <p:spPr>
-            <a:xfrm flipH="false" flipV="false" rot="0">
+            <a:xfrm>
               <a:off x="0" y="0"/>
               <a:ext cx="4816592" cy="93949"/>
             </a:xfrm>
@@ -4814,9 +4814,9 @@
               <a:gdLst/>
               <a:ahLst/>
               <a:cxnLst/>
-              <a:rect r="r" b="b" t="t" l="l"/>
+              <a:rect l="l" t="t" r="r" b="b"/>
               <a:pathLst>
-                <a:path h="93949" w="4816592">
+                <a:path w="4816592" h="93949">
                   <a:moveTo>
                     <a:pt x="0" y="0"/>
                   </a:moveTo>
@@ -4840,8 +4840,8 @@
         </p:sp>
         <p:sp>
           <p:nvSpPr>
-            <p:cNvPr name="TextBox 14" id="14"/>
-            <p:cNvSpPr txBox="true"/>
+            <p:cNvPr id="14" name="TextBox 14"/>
+            <p:cNvSpPr txBox="1"/>
             <p:nvPr/>
           </p:nvSpPr>
           <p:spPr>
@@ -4854,7 +4854,7 @@
             </a:prstGeom>
           </p:spPr>
           <p:txBody>
-            <a:bodyPr anchor="ctr" rtlCol="false" tIns="50800" lIns="50800" bIns="50800" rIns="50800"/>
+            <a:bodyPr lIns="50800" tIns="50800" rIns="50800" bIns="50800" rtlCol="0" anchor="ctr"/>
             <a:lstStyle/>
             <a:p>
               <a:pPr algn="ctr">
@@ -4862,6 +4862,7 @@
                   <a:spcPts val="2659"/>
                 </a:lnSpc>
               </a:pPr>
+              <a:endParaRPr/>
             </a:p>
           </p:txBody>
         </p:sp>
@@ -4875,7 +4876,7 @@
 </file>
 
 <file path=ppt/slides/slide4.xml><?xml version="1.0" encoding="utf-8"?>
-<p:sld xmlns:p="http://schemas.openxmlformats.org/presentationml/2006/main" xmlns:a="http://schemas.openxmlformats.org/drawingml/2006/main" xmlns:r="http://schemas.openxmlformats.org/officeDocument/2006/relationships">
+<p:sld xmlns:a="http://schemas.openxmlformats.org/drawingml/2006/main" xmlns:r="http://schemas.openxmlformats.org/officeDocument/2006/relationships" xmlns:p="http://schemas.openxmlformats.org/presentationml/2006/main">
   <p:cSld>
     <p:spTree>
       <p:nvGrpSpPr>
@@ -4893,12 +4894,12 @@
       </p:grpSpPr>
       <p:sp>
         <p:nvSpPr>
-          <p:cNvPr name="Freeform 2" id="2"/>
+          <p:cNvPr id="2" name="Freeform 2"/>
           <p:cNvSpPr/>
           <p:nvPr/>
         </p:nvSpPr>
         <p:spPr>
-          <a:xfrm flipH="false" flipV="false" rot="0">
+          <a:xfrm>
             <a:off x="0" y="0"/>
             <a:ext cx="18288000" cy="10287000"/>
           </a:xfrm>
@@ -4907,9 +4908,9 @@
             <a:gdLst/>
             <a:ahLst/>
             <a:cxnLst/>
-            <a:rect r="r" b="b" t="t" l="l"/>
+            <a:rect l="l" t="t" r="r" b="b"/>
             <a:pathLst>
-              <a:path h="10287000" w="18288000">
+              <a:path w="18288000" h="10287000">
                 <a:moveTo>
                   <a:pt x="0" y="0"/>
                 </a:moveTo>
@@ -4932,19 +4933,19 @@
           <a:blipFill>
             <a:blip r:embed="rId2"/>
             <a:stretch>
-              <a:fillRect l="-22276" t="-29412" r="-7136" b="0"/>
+              <a:fillRect l="-22276" t="-29412" r="-7136"/>
             </a:stretch>
           </a:blipFill>
         </p:spPr>
       </p:sp>
       <p:sp>
         <p:nvSpPr>
-          <p:cNvPr name="Freeform 3" id="3"/>
+          <p:cNvPr id="3" name="Freeform 3"/>
           <p:cNvSpPr/>
           <p:nvPr/>
         </p:nvSpPr>
         <p:spPr>
-          <a:xfrm flipH="false" flipV="false" rot="0">
+          <a:xfrm>
             <a:off x="-1756460" y="8867605"/>
             <a:ext cx="20044460" cy="2630835"/>
           </a:xfrm>
@@ -4953,9 +4954,9 @@
             <a:gdLst/>
             <a:ahLst/>
             <a:cxnLst/>
-            <a:rect r="r" b="b" t="t" l="l"/>
+            <a:rect l="l" t="t" r="r" b="b"/>
             <a:pathLst>
-              <a:path h="2630835" w="20044460">
+              <a:path w="20044460" h="2630835">
                 <a:moveTo>
                   <a:pt x="0" y="0"/>
                 </a:moveTo>
@@ -4976,8 +4977,113 @@
             </a:pathLst>
           </a:custGeom>
           <a:blipFill>
-            <a:blip r:embed="rId3">
+            <a:blip>
               <a:alphaModFix amt="9999"/>
+              <a:extLst>
+                <a:ext uri="{96DAC541-7B7A-43D3-8B79-37D633B846F1}">
+                  <asvg:svgBlip xmlns:asvg="http://schemas.microsoft.com/office/drawing/2016/SVG/main" r:embed="rId3"/>
+                </a:ext>
+              </a:extLst>
+            </a:blip>
+            <a:stretch>
+              <a:fillRect/>
+            </a:stretch>
+          </a:blipFill>
+        </p:spPr>
+      </p:sp>
+      <p:sp>
+        <p:nvSpPr>
+          <p:cNvPr id="4" name="Freeform 4"/>
+          <p:cNvSpPr/>
+          <p:nvPr/>
+        </p:nvSpPr>
+        <p:spPr>
+          <a:xfrm flipV="1">
+            <a:off x="0" y="-1315418"/>
+            <a:ext cx="20044460" cy="2630835"/>
+          </a:xfrm>
+          <a:custGeom>
+            <a:avLst/>
+            <a:gdLst/>
+            <a:ahLst/>
+            <a:cxnLst/>
+            <a:rect l="l" t="t" r="r" b="b"/>
+            <a:pathLst>
+              <a:path w="20044460" h="2630835">
+                <a:moveTo>
+                  <a:pt x="0" y="2630836"/>
+                </a:moveTo>
+                <a:lnTo>
+                  <a:pt x="20044460" y="2630836"/>
+                </a:lnTo>
+                <a:lnTo>
+                  <a:pt x="20044460" y="0"/>
+                </a:lnTo>
+                <a:lnTo>
+                  <a:pt x="0" y="0"/>
+                </a:lnTo>
+                <a:lnTo>
+                  <a:pt x="0" y="2630836"/>
+                </a:lnTo>
+                <a:close/>
+              </a:path>
+            </a:pathLst>
+          </a:custGeom>
+          <a:blipFill>
+            <a:blip>
+              <a:alphaModFix amt="9999"/>
+              <a:extLst>
+                <a:ext uri="{96DAC541-7B7A-43D3-8B79-37D633B846F1}">
+                  <asvg:svgBlip xmlns:asvg="http://schemas.microsoft.com/office/drawing/2016/SVG/main" r:embed="rId3"/>
+                </a:ext>
+              </a:extLst>
+            </a:blip>
+            <a:stretch>
+              <a:fillRect/>
+            </a:stretch>
+          </a:blipFill>
+        </p:spPr>
+      </p:sp>
+      <p:sp>
+        <p:nvSpPr>
+          <p:cNvPr id="5" name="Freeform 5"/>
+          <p:cNvSpPr/>
+          <p:nvPr/>
+        </p:nvSpPr>
+        <p:spPr>
+          <a:xfrm flipV="1">
+            <a:off x="11352291" y="-3270212"/>
+            <a:ext cx="6935709" cy="10106680"/>
+          </a:xfrm>
+          <a:custGeom>
+            <a:avLst/>
+            <a:gdLst/>
+            <a:ahLst/>
+            <a:cxnLst/>
+            <a:rect l="l" t="t" r="r" b="b"/>
+            <a:pathLst>
+              <a:path w="6935709" h="10106680">
+                <a:moveTo>
+                  <a:pt x="0" y="10106680"/>
+                </a:moveTo>
+                <a:lnTo>
+                  <a:pt x="6935709" y="10106680"/>
+                </a:lnTo>
+                <a:lnTo>
+                  <a:pt x="6935709" y="0"/>
+                </a:lnTo>
+                <a:lnTo>
+                  <a:pt x="0" y="0"/>
+                </a:lnTo>
+                <a:lnTo>
+                  <a:pt x="0" y="10106680"/>
+                </a:lnTo>
+                <a:close/>
+              </a:path>
+            </a:pathLst>
+          </a:custGeom>
+          <a:blipFill>
+            <a:blip>
               <a:extLst>
                 <a:ext uri="{96DAC541-7B7A-43D3-8B79-37D633B846F1}">
                   <asvg:svgBlip xmlns:asvg="http://schemas.microsoft.com/office/drawing/2016/SVG/main" r:embed="rId4"/>
@@ -4985,52 +5091,51 @@
               </a:extLst>
             </a:blip>
             <a:stretch>
-              <a:fillRect l="0" t="0" r="0" b="0"/>
+              <a:fillRect/>
             </a:stretch>
           </a:blipFill>
         </p:spPr>
       </p:sp>
       <p:sp>
         <p:nvSpPr>
-          <p:cNvPr name="Freeform 4" id="4"/>
+          <p:cNvPr id="6" name="Freeform 6"/>
           <p:cNvSpPr/>
           <p:nvPr/>
         </p:nvSpPr>
         <p:spPr>
-          <a:xfrm flipH="false" flipV="true" rot="0">
-            <a:off x="0" y="-1315418"/>
-            <a:ext cx="20044460" cy="2630835"/>
+          <a:xfrm>
+            <a:off x="11352291" y="3450532"/>
+            <a:ext cx="6935709" cy="10106680"/>
           </a:xfrm>
           <a:custGeom>
             <a:avLst/>
             <a:gdLst/>
             <a:ahLst/>
             <a:cxnLst/>
-            <a:rect r="r" b="b" t="t" l="l"/>
+            <a:rect l="l" t="t" r="r" b="b"/>
             <a:pathLst>
-              <a:path h="2630835" w="20044460">
+              <a:path w="6935709" h="10106680">
                 <a:moveTo>
-                  <a:pt x="0" y="2630836"/>
+                  <a:pt x="0" y="0"/>
                 </a:moveTo>
                 <a:lnTo>
-                  <a:pt x="20044460" y="2630836"/>
-                </a:lnTo>
-                <a:lnTo>
-                  <a:pt x="20044460" y="0"/>
+                  <a:pt x="6935709" y="0"/>
+                </a:lnTo>
+                <a:lnTo>
+                  <a:pt x="6935709" y="10106680"/>
+                </a:lnTo>
+                <a:lnTo>
+                  <a:pt x="0" y="10106680"/>
                 </a:lnTo>
                 <a:lnTo>
                   <a:pt x="0" y="0"/>
-                </a:lnTo>
-                <a:lnTo>
-                  <a:pt x="0" y="2630836"/>
                 </a:lnTo>
                 <a:close/>
               </a:path>
             </a:pathLst>
           </a:custGeom>
           <a:blipFill>
-            <a:blip r:embed="rId3">
-              <a:alphaModFix amt="9999"/>
+            <a:blip>
               <a:extLst>
                 <a:ext uri="{96DAC541-7B7A-43D3-8B79-37D633B846F1}">
                   <asvg:svgBlip xmlns:asvg="http://schemas.microsoft.com/office/drawing/2016/SVG/main" r:embed="rId4"/>
@@ -5038,93 +5143,87 @@
               </a:extLst>
             </a:blip>
             <a:stretch>
-              <a:fillRect l="0" t="0" r="0" b="0"/>
+              <a:fillRect/>
             </a:stretch>
           </a:blipFill>
         </p:spPr>
       </p:sp>
       <p:sp>
         <p:nvSpPr>
-          <p:cNvPr name="Freeform 5" id="5"/>
+          <p:cNvPr id="7" name="Freeform 7"/>
           <p:cNvSpPr/>
           <p:nvPr/>
         </p:nvSpPr>
         <p:spPr>
-          <a:xfrm flipH="false" flipV="true" rot="0">
-            <a:off x="11352291" y="-3270212"/>
-            <a:ext cx="6935709" cy="10106680"/>
+          <a:xfrm rot="-10800000">
+            <a:off x="13202147" y="706089"/>
+            <a:ext cx="4448189" cy="722831"/>
           </a:xfrm>
           <a:custGeom>
             <a:avLst/>
             <a:gdLst/>
             <a:ahLst/>
             <a:cxnLst/>
-            <a:rect r="r" b="b" t="t" l="l"/>
+            <a:rect l="l" t="t" r="r" b="b"/>
             <a:pathLst>
-              <a:path h="10106680" w="6935709">
+              <a:path w="4448189" h="722831">
                 <a:moveTo>
-                  <a:pt x="0" y="10106680"/>
+                  <a:pt x="0" y="0"/>
                 </a:moveTo>
                 <a:lnTo>
-                  <a:pt x="6935709" y="10106680"/>
-                </a:lnTo>
-                <a:lnTo>
-                  <a:pt x="6935709" y="0"/>
+                  <a:pt x="4448189" y="0"/>
+                </a:lnTo>
+                <a:lnTo>
+                  <a:pt x="4448189" y="722831"/>
+                </a:lnTo>
+                <a:lnTo>
+                  <a:pt x="0" y="722831"/>
                 </a:lnTo>
                 <a:lnTo>
                   <a:pt x="0" y="0"/>
-                </a:lnTo>
-                <a:lnTo>
-                  <a:pt x="0" y="10106680"/>
                 </a:lnTo>
                 <a:close/>
               </a:path>
             </a:pathLst>
           </a:custGeom>
           <a:blipFill>
-            <a:blip r:embed="rId5">
-              <a:extLst>
-                <a:ext uri="{96DAC541-7B7A-43D3-8B79-37D633B846F1}">
-                  <asvg:svgBlip xmlns:asvg="http://schemas.microsoft.com/office/drawing/2016/SVG/main" r:embed="rId6"/>
-                </a:ext>
-              </a:extLst>
-            </a:blip>
+            <a:blip r:embed="rId5"/>
             <a:stretch>
-              <a:fillRect l="0" t="0" r="0" b="0"/>
+              <a:fillRect/>
             </a:stretch>
           </a:blipFill>
         </p:spPr>
       </p:sp>
       <p:sp>
         <p:nvSpPr>
-          <p:cNvPr name="Freeform 6" id="6"/>
+          <p:cNvPr id="8" name="Freeform 8"/>
           <p:cNvSpPr/>
           <p:nvPr/>
         </p:nvSpPr>
         <p:spPr>
-          <a:xfrm flipH="false" flipV="false" rot="0">
-            <a:off x="11352291" y="3450532"/>
-            <a:ext cx="6935709" cy="10106680"/>
+          <a:xfrm>
+            <a:off x="13202147" y="8862843"/>
+            <a:ext cx="4448189" cy="722831"/>
           </a:xfrm>
           <a:custGeom>
             <a:avLst/>
             <a:gdLst/>
             <a:ahLst/>
             <a:cxnLst/>
-            <a:rect r="r" b="b" t="t" l="l"/>
+            <a:rect l="l" t="t" r="r" b="b"/>
             <a:pathLst>
-              <a:path h="10106680" w="6935709">
+              <a:path w="4448189" h="722831">
                 <a:moveTo>
                   <a:pt x="0" y="0"/>
                 </a:moveTo>
                 <a:lnTo>
-                  <a:pt x="6935709" y="0"/>
-                </a:lnTo>
-                <a:lnTo>
-                  <a:pt x="6935709" y="10106680"/>
-                </a:lnTo>
-                <a:lnTo>
-                  <a:pt x="0" y="10106680"/>
+                  <a:pt x="4448189" y="0"/>
+                </a:lnTo>
+                <a:lnTo>
+                  <a:pt x="4448189" y="722830"/>
+                </a:lnTo>
+                <a:lnTo>
+                  <a:pt x="0" y="722830"/>
                 </a:lnTo>
                 <a:lnTo>
                   <a:pt x="0" y="0"/>
@@ -5134,119 +5233,21 @@
             </a:pathLst>
           </a:custGeom>
           <a:blipFill>
-            <a:blip r:embed="rId5">
-              <a:extLst>
-                <a:ext uri="{96DAC541-7B7A-43D3-8B79-37D633B846F1}">
-                  <asvg:svgBlip xmlns:asvg="http://schemas.microsoft.com/office/drawing/2016/SVG/main" r:embed="rId6"/>
-                </a:ext>
-              </a:extLst>
-            </a:blip>
+            <a:blip r:embed="rId5"/>
             <a:stretch>
-              <a:fillRect l="0" t="0" r="0" b="0"/>
+              <a:fillRect/>
             </a:stretch>
           </a:blipFill>
         </p:spPr>
       </p:sp>
-      <p:sp>
-        <p:nvSpPr>
-          <p:cNvPr name="Freeform 7" id="7"/>
-          <p:cNvSpPr/>
-          <p:nvPr/>
-        </p:nvSpPr>
-        <p:spPr>
-          <a:xfrm flipH="false" flipV="false" rot="-10800000">
-            <a:off x="13202147" y="706089"/>
-            <a:ext cx="4448189" cy="722831"/>
-          </a:xfrm>
-          <a:custGeom>
-            <a:avLst/>
-            <a:gdLst/>
-            <a:ahLst/>
-            <a:cxnLst/>
-            <a:rect r="r" b="b" t="t" l="l"/>
-            <a:pathLst>
-              <a:path h="722831" w="4448189">
-                <a:moveTo>
-                  <a:pt x="0" y="0"/>
-                </a:moveTo>
-                <a:lnTo>
-                  <a:pt x="4448189" y="0"/>
-                </a:lnTo>
-                <a:lnTo>
-                  <a:pt x="4448189" y="722831"/>
-                </a:lnTo>
-                <a:lnTo>
-                  <a:pt x="0" y="722831"/>
-                </a:lnTo>
-                <a:lnTo>
-                  <a:pt x="0" y="0"/>
-                </a:lnTo>
-                <a:close/>
-              </a:path>
-            </a:pathLst>
-          </a:custGeom>
-          <a:blipFill>
-            <a:blip r:embed="rId7"/>
-            <a:stretch>
-              <a:fillRect l="0" t="0" r="0" b="0"/>
-            </a:stretch>
-          </a:blipFill>
-        </p:spPr>
-      </p:sp>
-      <p:sp>
-        <p:nvSpPr>
-          <p:cNvPr name="Freeform 8" id="8"/>
-          <p:cNvSpPr/>
-          <p:nvPr/>
-        </p:nvSpPr>
-        <p:spPr>
-          <a:xfrm flipH="false" flipV="false" rot="0">
-            <a:off x="13202147" y="8862843"/>
-            <a:ext cx="4448189" cy="722831"/>
-          </a:xfrm>
-          <a:custGeom>
-            <a:avLst/>
-            <a:gdLst/>
-            <a:ahLst/>
-            <a:cxnLst/>
-            <a:rect r="r" b="b" t="t" l="l"/>
-            <a:pathLst>
-              <a:path h="722831" w="4448189">
-                <a:moveTo>
-                  <a:pt x="0" y="0"/>
-                </a:moveTo>
-                <a:lnTo>
-                  <a:pt x="4448189" y="0"/>
-                </a:lnTo>
-                <a:lnTo>
-                  <a:pt x="4448189" y="722830"/>
-                </a:lnTo>
-                <a:lnTo>
-                  <a:pt x="0" y="722830"/>
-                </a:lnTo>
-                <a:lnTo>
-                  <a:pt x="0" y="0"/>
-                </a:lnTo>
-                <a:close/>
-              </a:path>
-            </a:pathLst>
-          </a:custGeom>
-          <a:blipFill>
-            <a:blip r:embed="rId7"/>
-            <a:stretch>
-              <a:fillRect l="0" t="0" r="0" b="0"/>
-            </a:stretch>
-          </a:blipFill>
-        </p:spPr>
-      </p:sp>
       <p:grpSp>
         <p:nvGrpSpPr>
-          <p:cNvPr name="Group 9" id="9"/>
+          <p:cNvPr id="9" name="Group 9"/>
           <p:cNvGrpSpPr/>
           <p:nvPr/>
         </p:nvGrpSpPr>
         <p:grpSpPr>
-          <a:xfrm rot="0">
+          <a:xfrm>
             <a:off x="11025343" y="1361478"/>
             <a:ext cx="8801797" cy="7564044"/>
             <a:chOff x="0" y="0"/>
@@ -5255,12 +5256,12 @@
         </p:grpSpPr>
         <p:sp>
           <p:nvSpPr>
-            <p:cNvPr name="Freeform 10" id="10"/>
+            <p:cNvPr id="10" name="Freeform 10"/>
             <p:cNvSpPr/>
             <p:nvPr/>
           </p:nvSpPr>
           <p:spPr>
-            <a:xfrm flipH="false" flipV="false" rot="0">
+            <a:xfrm>
               <a:off x="0" y="0"/>
               <a:ext cx="812800" cy="698500"/>
             </a:xfrm>
@@ -5269,9 +5270,9 @@
               <a:gdLst/>
               <a:ahLst/>
               <a:cxnLst/>
-              <a:rect r="r" b="b" t="t" l="l"/>
+              <a:rect l="l" t="t" r="r" b="b"/>
               <a:pathLst>
-                <a:path h="698500" w="812800">
+                <a:path w="812800" h="698500">
                   <a:moveTo>
                     <a:pt x="812800" y="349250"/>
                   </a:moveTo>
@@ -5304,8 +5305,8 @@
         </p:sp>
         <p:sp>
           <p:nvSpPr>
-            <p:cNvPr name="TextBox 11" id="11"/>
-            <p:cNvSpPr txBox="true"/>
+            <p:cNvPr id="11" name="TextBox 11"/>
+            <p:cNvSpPr txBox="1"/>
             <p:nvPr/>
           </p:nvSpPr>
           <p:spPr>
@@ -5318,7 +5319,7 @@
             </a:prstGeom>
           </p:spPr>
           <p:txBody>
-            <a:bodyPr anchor="ctr" rtlCol="false" tIns="50800" lIns="50800" bIns="50800" rIns="50800"/>
+            <a:bodyPr lIns="50800" tIns="50800" rIns="50800" bIns="50800" rtlCol="0" anchor="ctr"/>
             <a:lstStyle/>
             <a:p>
               <a:pPr algn="ctr">
@@ -5326,18 +5327,19 @@
                   <a:spcPts val="2659"/>
                 </a:lnSpc>
               </a:pPr>
+              <a:endParaRPr/>
             </a:p>
           </p:txBody>
         </p:sp>
       </p:grpSp>
       <p:grpSp>
         <p:nvGrpSpPr>
-          <p:cNvPr name="Group 12" id="12"/>
+          <p:cNvPr id="12" name="Group 12"/>
           <p:cNvGrpSpPr/>
           <p:nvPr/>
         </p:nvGrpSpPr>
         <p:grpSpPr>
-          <a:xfrm rot="0">
+          <a:xfrm>
             <a:off x="11547166" y="1809920"/>
             <a:ext cx="7758150" cy="6667161"/>
             <a:chOff x="0" y="0"/>
@@ -5346,12 +5348,12 @@
         </p:grpSpPr>
         <p:sp>
           <p:nvSpPr>
-            <p:cNvPr name="Freeform 13" id="13"/>
+            <p:cNvPr id="13" name="Freeform 13"/>
             <p:cNvSpPr/>
             <p:nvPr/>
           </p:nvSpPr>
           <p:spPr>
-            <a:xfrm flipH="false" flipV="false" rot="0">
+            <a:xfrm>
               <a:off x="0" y="0"/>
               <a:ext cx="812800" cy="698500"/>
             </a:xfrm>
@@ -5360,9 +5362,9 @@
               <a:gdLst/>
               <a:ahLst/>
               <a:cxnLst/>
-              <a:rect r="r" b="b" t="t" l="l"/>
+              <a:rect l="l" t="t" r="r" b="b"/>
               <a:pathLst>
-                <a:path h="698500" w="812800">
+                <a:path w="812800" h="698500">
                   <a:moveTo>
                     <a:pt x="812800" y="349250"/>
                   </a:moveTo>
@@ -5389,9 +5391,9 @@
               </a:pathLst>
             </a:custGeom>
             <a:blipFill>
-              <a:blip r:embed="rId8"/>
+              <a:blip r:embed="rId6"/>
               <a:stretch>
-                <a:fillRect l="-28745" t="0" r="0" b="0"/>
+                <a:fillRect l="-28745"/>
               </a:stretch>
             </a:blipFill>
           </p:spPr>
@@ -5399,12 +5401,12 @@
       </p:grpSp>
       <p:grpSp>
         <p:nvGrpSpPr>
-          <p:cNvPr name="Group 14" id="14"/>
+          <p:cNvPr id="14" name="Group 14"/>
           <p:cNvGrpSpPr/>
           <p:nvPr/>
         </p:nvGrpSpPr>
         <p:grpSpPr>
-          <a:xfrm rot="0">
+          <a:xfrm>
             <a:off x="0" y="9930289"/>
             <a:ext cx="18288000" cy="356711"/>
             <a:chOff x="0" y="0"/>
@@ -5413,12 +5415,12 @@
         </p:grpSpPr>
         <p:sp>
           <p:nvSpPr>
-            <p:cNvPr name="Freeform 15" id="15"/>
+            <p:cNvPr id="15" name="Freeform 15"/>
             <p:cNvSpPr/>
             <p:nvPr/>
           </p:nvSpPr>
           <p:spPr>
-            <a:xfrm flipH="false" flipV="false" rot="0">
+            <a:xfrm>
               <a:off x="0" y="0"/>
               <a:ext cx="4816592" cy="93949"/>
             </a:xfrm>
@@ -5427,9 +5429,9 @@
               <a:gdLst/>
               <a:ahLst/>
               <a:cxnLst/>
-              <a:rect r="r" b="b" t="t" l="l"/>
+              <a:rect l="l" t="t" r="r" b="b"/>
               <a:pathLst>
-                <a:path h="93949" w="4816592">
+                <a:path w="4816592" h="93949">
                   <a:moveTo>
                     <a:pt x="0" y="0"/>
                   </a:moveTo>
@@ -5453,8 +5455,8 @@
         </p:sp>
         <p:sp>
           <p:nvSpPr>
-            <p:cNvPr name="TextBox 16" id="16"/>
-            <p:cNvSpPr txBox="true"/>
+            <p:cNvPr id="16" name="TextBox 16"/>
+            <p:cNvSpPr txBox="1"/>
             <p:nvPr/>
           </p:nvSpPr>
           <p:spPr>
@@ -5467,7 +5469,7 @@
             </a:prstGeom>
           </p:spPr>
           <p:txBody>
-            <a:bodyPr anchor="ctr" rtlCol="false" tIns="50800" lIns="50800" bIns="50800" rIns="50800"/>
+            <a:bodyPr lIns="50800" tIns="50800" rIns="50800" bIns="50800" rtlCol="0" anchor="ctr"/>
             <a:lstStyle/>
             <a:p>
               <a:pPr algn="ctr">
@@ -5475,18 +5477,19 @@
                   <a:spcPts val="2659"/>
                 </a:lnSpc>
               </a:pPr>
+              <a:endParaRPr/>
             </a:p>
           </p:txBody>
         </p:sp>
       </p:grpSp>
       <p:sp>
         <p:nvSpPr>
-          <p:cNvPr name="TextBox 17" id="17"/>
-          <p:cNvSpPr txBox="true"/>
+          <p:cNvPr id="17" name="TextBox 17"/>
+          <p:cNvSpPr txBox="1"/>
           <p:nvPr/>
         </p:nvSpPr>
         <p:spPr>
-          <a:xfrm rot="0">
+          <a:xfrm>
             <a:off x="436450" y="1522598"/>
             <a:ext cx="7970561" cy="1687078"/>
           </a:xfrm>
@@ -5495,7 +5498,7 @@
           </a:prstGeom>
         </p:spPr>
         <p:txBody>
-          <a:bodyPr anchor="t" rtlCol="false" tIns="0" lIns="0" bIns="0" rIns="0">
+          <a:bodyPr lIns="0" tIns="0" rIns="0" bIns="0" rtlCol="0" anchor="t">
             <a:spAutoFit/>
           </a:bodyPr>
           <a:lstStyle/>
@@ -5525,12 +5528,12 @@
       </p:sp>
       <p:sp>
         <p:nvSpPr>
-          <p:cNvPr name="TextBox 18" id="18"/>
-          <p:cNvSpPr txBox="true"/>
+          <p:cNvPr id="18" name="TextBox 18"/>
+          <p:cNvSpPr txBox="1"/>
           <p:nvPr/>
         </p:nvSpPr>
         <p:spPr>
-          <a:xfrm rot="0">
+          <a:xfrm>
             <a:off x="436450" y="3123951"/>
             <a:ext cx="10394796" cy="6100307"/>
           </a:xfrm>
@@ -5539,12 +5542,12 @@
           </a:prstGeom>
         </p:spPr>
         <p:txBody>
-          <a:bodyPr anchor="t" rtlCol="false" tIns="0" lIns="0" bIns="0" rIns="0">
+          <a:bodyPr lIns="0" tIns="0" rIns="0" bIns="0" rtlCol="0" anchor="t">
             <a:spAutoFit/>
           </a:bodyPr>
           <a:lstStyle/>
           <a:p>
-            <a:pPr algn="just" marL="934937" indent="-467469" lvl="1">
+            <a:pPr marL="934937" lvl="1" indent="-467469" algn="just">
               <a:lnSpc>
                 <a:spcPts val="6062"/>
               </a:lnSpc>
@@ -5561,23 +5564,11 @@
                 <a:cs typeface="Poppins"/>
                 <a:sym typeface="Poppins"/>
               </a:rPr>
-              <a:t>T</a:t>
+              <a:t>To organize queues efficiently using FIFO logic, guaranteeing fairness.</a:t>
             </a:r>
-            <a:r>
-              <a:rPr lang="en-US" sz="4330">
-                <a:solidFill>
-                  <a:srgbClr val="FFFFFF"/>
-                </a:solidFill>
-                <a:latin typeface="Poppins"/>
-                <a:ea typeface="Poppins"/>
-                <a:cs typeface="Poppins"/>
-                <a:sym typeface="Poppins"/>
-              </a:rPr>
-              <a:t>o organize queues efficiently using FIFO logic, guaranteeing fairness.</a:t>
-            </a:r>
-          </a:p>
-          <a:p>
-            <a:pPr algn="just" marL="934937" indent="-467469" lvl="1">
+          </a:p>
+          <a:p>
+            <a:pPr marL="934937" lvl="1" indent="-467469" algn="just">
               <a:lnSpc>
                 <a:spcPts val="6062"/>
               </a:lnSpc>
@@ -5598,7 +5589,7 @@
             </a:r>
           </a:p>
           <a:p>
-            <a:pPr algn="just" marL="934937" indent="-467469" lvl="1">
+            <a:pPr marL="934937" lvl="1" indent="-467469" algn="just">
               <a:lnSpc>
                 <a:spcPts val="6062"/>
               </a:lnSpc>
@@ -5629,7 +5620,7 @@
 </file>
 
 <file path=ppt/slides/slide5.xml><?xml version="1.0" encoding="utf-8"?>
-<p:sld xmlns:p="http://schemas.openxmlformats.org/presentationml/2006/main" xmlns:a="http://schemas.openxmlformats.org/drawingml/2006/main" xmlns:r="http://schemas.openxmlformats.org/officeDocument/2006/relationships">
+<p:sld xmlns:a="http://schemas.openxmlformats.org/drawingml/2006/main" xmlns:r="http://schemas.openxmlformats.org/officeDocument/2006/relationships" xmlns:p="http://schemas.openxmlformats.org/presentationml/2006/main">
   <p:cSld>
     <p:spTree>
       <p:nvGrpSpPr>
@@ -5647,12 +5638,12 @@
       </p:grpSpPr>
       <p:sp>
         <p:nvSpPr>
-          <p:cNvPr name="Freeform 2" id="2"/>
+          <p:cNvPr id="2" name="Freeform 2"/>
           <p:cNvSpPr/>
           <p:nvPr/>
         </p:nvSpPr>
         <p:spPr>
-          <a:xfrm flipH="false" flipV="false" rot="0">
+          <a:xfrm>
             <a:off x="0" y="0"/>
             <a:ext cx="18288000" cy="10287000"/>
           </a:xfrm>
@@ -5661,9 +5652,9 @@
             <a:gdLst/>
             <a:ahLst/>
             <a:cxnLst/>
-            <a:rect r="r" b="b" t="t" l="l"/>
+            <a:rect l="l" t="t" r="r" b="b"/>
             <a:pathLst>
-              <a:path h="10287000" w="18288000">
+              <a:path w="18288000" h="10287000">
                 <a:moveTo>
                   <a:pt x="0" y="0"/>
                 </a:moveTo>
@@ -5686,19 +5677,19 @@
           <a:blipFill>
             <a:blip r:embed="rId2"/>
             <a:stretch>
-              <a:fillRect l="-29412" t="0" r="0" b="-29412"/>
+              <a:fillRect l="-29412" b="-29412"/>
             </a:stretch>
           </a:blipFill>
         </p:spPr>
       </p:sp>
       <p:grpSp>
         <p:nvGrpSpPr>
-          <p:cNvPr name="Group 3" id="3"/>
+          <p:cNvPr id="3" name="Group 3"/>
           <p:cNvGrpSpPr/>
           <p:nvPr/>
         </p:nvGrpSpPr>
         <p:grpSpPr>
-          <a:xfrm rot="0">
+          <a:xfrm>
             <a:off x="6743839" y="6237092"/>
             <a:ext cx="4359465" cy="1948032"/>
             <a:chOff x="0" y="0"/>
@@ -5707,12 +5698,12 @@
         </p:grpSpPr>
         <p:sp>
           <p:nvSpPr>
-            <p:cNvPr name="Freeform 4" id="4"/>
+            <p:cNvPr id="4" name="Freeform 4"/>
             <p:cNvSpPr/>
             <p:nvPr/>
           </p:nvSpPr>
           <p:spPr>
-            <a:xfrm flipH="false" flipV="false" rot="0">
+            <a:xfrm>
               <a:off x="0" y="0"/>
               <a:ext cx="812800" cy="363201"/>
             </a:xfrm>
@@ -5721,9 +5712,9 @@
               <a:gdLst/>
               <a:ahLst/>
               <a:cxnLst/>
-              <a:rect r="r" b="b" t="t" l="l"/>
+              <a:rect l="l" t="t" r="r" b="b"/>
               <a:pathLst>
-                <a:path h="363201" w="812800">
+                <a:path w="812800" h="363201">
                   <a:moveTo>
                     <a:pt x="0" y="0"/>
                   </a:moveTo>
@@ -5747,8 +5738,8 @@
         </p:sp>
         <p:sp>
           <p:nvSpPr>
-            <p:cNvPr name="TextBox 5" id="5"/>
-            <p:cNvSpPr txBox="true"/>
+            <p:cNvPr id="5" name="TextBox 5"/>
+            <p:cNvSpPr txBox="1"/>
             <p:nvPr/>
           </p:nvSpPr>
           <p:spPr>
@@ -5761,7 +5752,7 @@
             </a:prstGeom>
           </p:spPr>
           <p:txBody>
-            <a:bodyPr anchor="ctr" rtlCol="false" tIns="50800" lIns="50800" bIns="50800" rIns="50800"/>
+            <a:bodyPr lIns="50800" tIns="50800" rIns="50800" bIns="50800" rtlCol="0" anchor="ctr"/>
             <a:lstStyle/>
             <a:p>
               <a:pPr algn="ctr">
@@ -5769,18 +5760,19 @@
                   <a:spcPts val="2520"/>
                 </a:lnSpc>
               </a:pPr>
+              <a:endParaRPr/>
             </a:p>
           </p:txBody>
         </p:sp>
       </p:grpSp>
       <p:sp>
         <p:nvSpPr>
-          <p:cNvPr name="Freeform 6" id="6"/>
+          <p:cNvPr id="6" name="Freeform 6"/>
           <p:cNvSpPr/>
           <p:nvPr/>
         </p:nvSpPr>
         <p:spPr>
-          <a:xfrm flipH="false" flipV="false" rot="0">
+          <a:xfrm>
             <a:off x="-1756460" y="8157446"/>
             <a:ext cx="20044460" cy="2630835"/>
           </a:xfrm>
@@ -5789,9 +5781,9 @@
             <a:gdLst/>
             <a:ahLst/>
             <a:cxnLst/>
-            <a:rect r="r" b="b" t="t" l="l"/>
+            <a:rect l="l" t="t" r="r" b="b"/>
             <a:pathLst>
-              <a:path h="2630835" w="20044460">
+              <a:path w="20044460" h="2630835">
                 <a:moveTo>
                   <a:pt x="0" y="0"/>
                 </a:moveTo>
@@ -5812,28 +5804,28 @@
             </a:pathLst>
           </a:custGeom>
           <a:blipFill>
-            <a:blip r:embed="rId3">
+            <a:blip>
               <a:alphaModFix amt="9999"/>
               <a:extLst>
                 <a:ext uri="{96DAC541-7B7A-43D3-8B79-37D633B846F1}">
-                  <asvg:svgBlip xmlns:asvg="http://schemas.microsoft.com/office/drawing/2016/SVG/main" r:embed="rId4"/>
+                  <asvg:svgBlip xmlns:asvg="http://schemas.microsoft.com/office/drawing/2016/SVG/main" r:embed="rId3"/>
                 </a:ext>
               </a:extLst>
             </a:blip>
             <a:stretch>
-              <a:fillRect l="0" t="0" r="0" b="0"/>
+              <a:fillRect/>
             </a:stretch>
           </a:blipFill>
         </p:spPr>
       </p:sp>
       <p:grpSp>
         <p:nvGrpSpPr>
-          <p:cNvPr name="Group 7" id="7"/>
+          <p:cNvPr id="7" name="Group 7"/>
           <p:cNvGrpSpPr/>
           <p:nvPr/>
         </p:nvGrpSpPr>
         <p:grpSpPr>
-          <a:xfrm rot="0">
+          <a:xfrm>
             <a:off x="1627744" y="3762416"/>
             <a:ext cx="4359465" cy="1948032"/>
             <a:chOff x="0" y="0"/>
@@ -5842,12 +5834,12 @@
         </p:grpSpPr>
         <p:sp>
           <p:nvSpPr>
-            <p:cNvPr name="Freeform 8" id="8"/>
+            <p:cNvPr id="8" name="Freeform 8"/>
             <p:cNvSpPr/>
             <p:nvPr/>
           </p:nvSpPr>
           <p:spPr>
-            <a:xfrm flipH="false" flipV="false" rot="0">
+            <a:xfrm>
               <a:off x="0" y="0"/>
               <a:ext cx="812800" cy="363201"/>
             </a:xfrm>
@@ -5856,9 +5848,9 @@
               <a:gdLst/>
               <a:ahLst/>
               <a:cxnLst/>
-              <a:rect r="r" b="b" t="t" l="l"/>
+              <a:rect l="l" t="t" r="r" b="b"/>
               <a:pathLst>
-                <a:path h="363201" w="812800">
+                <a:path w="812800" h="363201">
                   <a:moveTo>
                     <a:pt x="0" y="0"/>
                   </a:moveTo>
@@ -5882,8 +5874,8 @@
         </p:sp>
         <p:sp>
           <p:nvSpPr>
-            <p:cNvPr name="TextBox 9" id="9"/>
-            <p:cNvSpPr txBox="true"/>
+            <p:cNvPr id="9" name="TextBox 9"/>
+            <p:cNvSpPr txBox="1"/>
             <p:nvPr/>
           </p:nvSpPr>
           <p:spPr>
@@ -5896,7 +5888,7 @@
             </a:prstGeom>
           </p:spPr>
           <p:txBody>
-            <a:bodyPr anchor="ctr" rtlCol="false" tIns="50800" lIns="50800" bIns="50800" rIns="50800"/>
+            <a:bodyPr lIns="50800" tIns="50800" rIns="50800" bIns="50800" rtlCol="0" anchor="ctr"/>
             <a:lstStyle/>
             <a:p>
               <a:pPr algn="ctr">
@@ -5904,18 +5896,19 @@
                   <a:spcPts val="2520"/>
                 </a:lnSpc>
               </a:pPr>
+              <a:endParaRPr/>
             </a:p>
           </p:txBody>
         </p:sp>
       </p:grpSp>
       <p:grpSp>
         <p:nvGrpSpPr>
-          <p:cNvPr name="Group 10" id="10"/>
+          <p:cNvPr id="10" name="Group 10"/>
           <p:cNvGrpSpPr/>
           <p:nvPr/>
         </p:nvGrpSpPr>
         <p:grpSpPr>
-          <a:xfrm rot="0">
+          <a:xfrm>
             <a:off x="1421409" y="3581651"/>
             <a:ext cx="4359465" cy="1948032"/>
             <a:chOff x="0" y="0"/>
@@ -5924,12 +5917,12 @@
         </p:grpSpPr>
         <p:sp>
           <p:nvSpPr>
-            <p:cNvPr name="Freeform 11" id="11"/>
+            <p:cNvPr id="11" name="Freeform 11"/>
             <p:cNvSpPr/>
             <p:nvPr/>
           </p:nvSpPr>
           <p:spPr>
-            <a:xfrm flipH="false" flipV="false" rot="0">
+            <a:xfrm>
               <a:off x="0" y="0"/>
               <a:ext cx="812800" cy="363201"/>
             </a:xfrm>
@@ -5938,9 +5931,9 @@
               <a:gdLst/>
               <a:ahLst/>
               <a:cxnLst/>
-              <a:rect r="r" b="b" t="t" l="l"/>
+              <a:rect l="l" t="t" r="r" b="b"/>
               <a:pathLst>
-                <a:path h="363201" w="812800">
+                <a:path w="812800" h="363201">
                   <a:moveTo>
                     <a:pt x="0" y="0"/>
                   </a:moveTo>
@@ -5964,8 +5957,8 @@
         </p:sp>
         <p:sp>
           <p:nvSpPr>
-            <p:cNvPr name="TextBox 12" id="12"/>
-            <p:cNvSpPr txBox="true"/>
+            <p:cNvPr id="12" name="TextBox 12"/>
+            <p:cNvSpPr txBox="1"/>
             <p:nvPr/>
           </p:nvSpPr>
           <p:spPr>
@@ -5978,7 +5971,7 @@
             </a:prstGeom>
           </p:spPr>
           <p:txBody>
-            <a:bodyPr anchor="ctr" rtlCol="false" tIns="50800" lIns="50800" bIns="50800" rIns="50800"/>
+            <a:bodyPr lIns="50800" tIns="50800" rIns="50800" bIns="50800" rtlCol="0" anchor="ctr"/>
             <a:lstStyle/>
             <a:p>
               <a:pPr algn="ctr">
@@ -5986,18 +5979,19 @@
                   <a:spcPts val="2520"/>
                 </a:lnSpc>
               </a:pPr>
+              <a:endParaRPr/>
             </a:p>
           </p:txBody>
         </p:sp>
       </p:grpSp>
       <p:sp>
         <p:nvSpPr>
-          <p:cNvPr name="Freeform 13" id="13"/>
+          <p:cNvPr id="13" name="Freeform 13"/>
           <p:cNvSpPr/>
           <p:nvPr/>
         </p:nvSpPr>
         <p:spPr>
-          <a:xfrm flipH="false" flipV="true" rot="0">
+          <a:xfrm flipV="1">
             <a:off x="0" y="-1315418"/>
             <a:ext cx="20044460" cy="2630835"/>
           </a:xfrm>
@@ -6006,9 +6000,9 @@
             <a:gdLst/>
             <a:ahLst/>
             <a:cxnLst/>
-            <a:rect r="r" b="b" t="t" l="l"/>
+            <a:rect l="l" t="t" r="r" b="b"/>
             <a:pathLst>
-              <a:path h="2630835" w="20044460">
+              <a:path w="20044460" h="2630835">
                 <a:moveTo>
                   <a:pt x="0" y="2630836"/>
                 </a:moveTo>
@@ -6029,8 +6023,60 @@
             </a:pathLst>
           </a:custGeom>
           <a:blipFill>
-            <a:blip r:embed="rId3">
+            <a:blip>
               <a:alphaModFix amt="9999"/>
+              <a:extLst>
+                <a:ext uri="{96DAC541-7B7A-43D3-8B79-37D633B846F1}">
+                  <asvg:svgBlip xmlns:asvg="http://schemas.microsoft.com/office/drawing/2016/SVG/main" r:embed="rId3"/>
+                </a:ext>
+              </a:extLst>
+            </a:blip>
+            <a:stretch>
+              <a:fillRect/>
+            </a:stretch>
+          </a:blipFill>
+        </p:spPr>
+      </p:sp>
+      <p:sp>
+        <p:nvSpPr>
+          <p:cNvPr id="14" name="Freeform 14"/>
+          <p:cNvSpPr/>
+          <p:nvPr/>
+        </p:nvSpPr>
+        <p:spPr>
+          <a:xfrm>
+            <a:off x="11352291" y="1183752"/>
+            <a:ext cx="6935709" cy="10106680"/>
+          </a:xfrm>
+          <a:custGeom>
+            <a:avLst/>
+            <a:gdLst/>
+            <a:ahLst/>
+            <a:cxnLst/>
+            <a:rect l="l" t="t" r="r" b="b"/>
+            <a:pathLst>
+              <a:path w="6935709" h="10106680">
+                <a:moveTo>
+                  <a:pt x="0" y="0"/>
+                </a:moveTo>
+                <a:lnTo>
+                  <a:pt x="6935709" y="0"/>
+                </a:lnTo>
+                <a:lnTo>
+                  <a:pt x="6935709" y="10106680"/>
+                </a:lnTo>
+                <a:lnTo>
+                  <a:pt x="0" y="10106680"/>
+                </a:lnTo>
+                <a:lnTo>
+                  <a:pt x="0" y="0"/>
+                </a:lnTo>
+                <a:close/>
+              </a:path>
+            </a:pathLst>
+          </a:custGeom>
+          <a:blipFill>
+            <a:blip>
               <a:extLst>
                 <a:ext uri="{96DAC541-7B7A-43D3-8B79-37D633B846F1}">
                   <asvg:svgBlip xmlns:asvg="http://schemas.microsoft.com/office/drawing/2016/SVG/main" r:embed="rId4"/>
@@ -6038,41 +6084,41 @@
               </a:extLst>
             </a:blip>
             <a:stretch>
-              <a:fillRect l="0" t="0" r="0" b="0"/>
+              <a:fillRect/>
             </a:stretch>
           </a:blipFill>
         </p:spPr>
       </p:sp>
       <p:sp>
         <p:nvSpPr>
-          <p:cNvPr name="Freeform 14" id="14"/>
+          <p:cNvPr id="15" name="Freeform 15"/>
           <p:cNvSpPr/>
           <p:nvPr/>
         </p:nvSpPr>
         <p:spPr>
-          <a:xfrm flipH="false" flipV="false" rot="0">
-            <a:off x="11352291" y="1183752"/>
-            <a:ext cx="6935709" cy="10106680"/>
+          <a:xfrm>
+            <a:off x="14365028" y="6823550"/>
+            <a:ext cx="4448189" cy="722831"/>
           </a:xfrm>
           <a:custGeom>
             <a:avLst/>
             <a:gdLst/>
             <a:ahLst/>
             <a:cxnLst/>
-            <a:rect r="r" b="b" t="t" l="l"/>
+            <a:rect l="l" t="t" r="r" b="b"/>
             <a:pathLst>
-              <a:path h="10106680" w="6935709">
+              <a:path w="4448189" h="722831">
                 <a:moveTo>
                   <a:pt x="0" y="0"/>
                 </a:moveTo>
                 <a:lnTo>
-                  <a:pt x="6935709" y="0"/>
-                </a:lnTo>
-                <a:lnTo>
-                  <a:pt x="6935709" y="10106680"/>
-                </a:lnTo>
-                <a:lnTo>
-                  <a:pt x="0" y="10106680"/>
+                  <a:pt x="4448189" y="0"/>
+                </a:lnTo>
+                <a:lnTo>
+                  <a:pt x="4448189" y="722831"/>
+                </a:lnTo>
+                <a:lnTo>
+                  <a:pt x="0" y="722831"/>
                 </a:lnTo>
                 <a:lnTo>
                   <a:pt x="0" y="0"/>
@@ -6082,73 +6128,21 @@
             </a:pathLst>
           </a:custGeom>
           <a:blipFill>
-            <a:blip r:embed="rId5">
-              <a:extLst>
-                <a:ext uri="{96DAC541-7B7A-43D3-8B79-37D633B846F1}">
-                  <asvg:svgBlip xmlns:asvg="http://schemas.microsoft.com/office/drawing/2016/SVG/main" r:embed="rId6"/>
-                </a:ext>
-              </a:extLst>
-            </a:blip>
+            <a:blip r:embed="rId5"/>
             <a:stretch>
-              <a:fillRect l="0" t="0" r="0" b="0"/>
+              <a:fillRect/>
             </a:stretch>
           </a:blipFill>
         </p:spPr>
       </p:sp>
-      <p:sp>
-        <p:nvSpPr>
-          <p:cNvPr name="Freeform 15" id="15"/>
-          <p:cNvSpPr/>
-          <p:nvPr/>
-        </p:nvSpPr>
-        <p:spPr>
-          <a:xfrm flipH="false" flipV="false" rot="0">
-            <a:off x="14365028" y="6823550"/>
-            <a:ext cx="4448189" cy="722831"/>
-          </a:xfrm>
-          <a:custGeom>
-            <a:avLst/>
-            <a:gdLst/>
-            <a:ahLst/>
-            <a:cxnLst/>
-            <a:rect r="r" b="b" t="t" l="l"/>
-            <a:pathLst>
-              <a:path h="722831" w="4448189">
-                <a:moveTo>
-                  <a:pt x="0" y="0"/>
-                </a:moveTo>
-                <a:lnTo>
-                  <a:pt x="4448189" y="0"/>
-                </a:lnTo>
-                <a:lnTo>
-                  <a:pt x="4448189" y="722831"/>
-                </a:lnTo>
-                <a:lnTo>
-                  <a:pt x="0" y="722831"/>
-                </a:lnTo>
-                <a:lnTo>
-                  <a:pt x="0" y="0"/>
-                </a:lnTo>
-                <a:close/>
-              </a:path>
-            </a:pathLst>
-          </a:custGeom>
-          <a:blipFill>
-            <a:blip r:embed="rId7"/>
-            <a:stretch>
-              <a:fillRect l="0" t="0" r="0" b="0"/>
-            </a:stretch>
-          </a:blipFill>
-        </p:spPr>
-      </p:sp>
       <p:grpSp>
         <p:nvGrpSpPr>
-          <p:cNvPr name="Group 16" id="16"/>
+          <p:cNvPr id="16" name="Group 16"/>
           <p:cNvGrpSpPr/>
           <p:nvPr/>
         </p:nvGrpSpPr>
         <p:grpSpPr>
-          <a:xfrm rot="0">
+          <a:xfrm>
             <a:off x="12188225" y="-683343"/>
             <a:ext cx="8801797" cy="7564044"/>
             <a:chOff x="0" y="0"/>
@@ -6157,12 +6151,12 @@
         </p:grpSpPr>
         <p:sp>
           <p:nvSpPr>
-            <p:cNvPr name="Freeform 17" id="17"/>
+            <p:cNvPr id="17" name="Freeform 17"/>
             <p:cNvSpPr/>
             <p:nvPr/>
           </p:nvSpPr>
           <p:spPr>
-            <a:xfrm flipH="false" flipV="false" rot="0">
+            <a:xfrm>
               <a:off x="0" y="0"/>
               <a:ext cx="812800" cy="698500"/>
             </a:xfrm>
@@ -6171,9 +6165,9 @@
               <a:gdLst/>
               <a:ahLst/>
               <a:cxnLst/>
-              <a:rect r="r" b="b" t="t" l="l"/>
+              <a:rect l="l" t="t" r="r" b="b"/>
               <a:pathLst>
-                <a:path h="698500" w="812800">
+                <a:path w="812800" h="698500">
                   <a:moveTo>
                     <a:pt x="812800" y="349250"/>
                   </a:moveTo>
@@ -6206,8 +6200,8 @@
         </p:sp>
         <p:sp>
           <p:nvSpPr>
-            <p:cNvPr name="TextBox 18" id="18"/>
-            <p:cNvSpPr txBox="true"/>
+            <p:cNvPr id="18" name="TextBox 18"/>
+            <p:cNvSpPr txBox="1"/>
             <p:nvPr/>
           </p:nvSpPr>
           <p:spPr>
@@ -6220,7 +6214,7 @@
             </a:prstGeom>
           </p:spPr>
           <p:txBody>
-            <a:bodyPr anchor="ctr" rtlCol="false" tIns="50800" lIns="50800" bIns="50800" rIns="50800"/>
+            <a:bodyPr lIns="50800" tIns="50800" rIns="50800" bIns="50800" rtlCol="0" anchor="ctr"/>
             <a:lstStyle/>
             <a:p>
               <a:pPr algn="ctr">
@@ -6228,18 +6222,19 @@
                   <a:spcPts val="2659"/>
                 </a:lnSpc>
               </a:pPr>
+              <a:endParaRPr/>
             </a:p>
           </p:txBody>
         </p:sp>
       </p:grpSp>
       <p:grpSp>
         <p:nvGrpSpPr>
-          <p:cNvPr name="Group 19" id="19"/>
+          <p:cNvPr id="19" name="Group 19"/>
           <p:cNvGrpSpPr/>
           <p:nvPr/>
         </p:nvGrpSpPr>
         <p:grpSpPr>
-          <a:xfrm rot="0">
+          <a:xfrm>
             <a:off x="12710048" y="-234902"/>
             <a:ext cx="7758150" cy="6667161"/>
             <a:chOff x="0" y="0"/>
@@ -6248,12 +6243,12 @@
         </p:grpSpPr>
         <p:sp>
           <p:nvSpPr>
-            <p:cNvPr name="Freeform 20" id="20"/>
+            <p:cNvPr id="20" name="Freeform 20"/>
             <p:cNvSpPr/>
             <p:nvPr/>
           </p:nvSpPr>
           <p:spPr>
-            <a:xfrm flipH="false" flipV="false" rot="0">
+            <a:xfrm>
               <a:off x="0" y="0"/>
               <a:ext cx="812800" cy="698500"/>
             </a:xfrm>
@@ -6262,9 +6257,9 @@
               <a:gdLst/>
               <a:ahLst/>
               <a:cxnLst/>
-              <a:rect r="r" b="b" t="t" l="l"/>
+              <a:rect l="l" t="t" r="r" b="b"/>
               <a:pathLst>
-                <a:path h="698500" w="812800">
+                <a:path w="812800" h="698500">
                   <a:moveTo>
                     <a:pt x="812800" y="349250"/>
                   </a:moveTo>
@@ -6291,9 +6286,9 @@
               </a:pathLst>
             </a:custGeom>
             <a:blipFill>
-              <a:blip r:embed="rId8"/>
+              <a:blip r:embed="rId6"/>
               <a:stretch>
-                <a:fillRect l="-28745" t="0" r="0" b="0"/>
+                <a:fillRect l="-28745"/>
               </a:stretch>
             </a:blipFill>
           </p:spPr>
@@ -6301,12 +6296,12 @@
       </p:grpSp>
       <p:grpSp>
         <p:nvGrpSpPr>
-          <p:cNvPr name="Group 21" id="21"/>
+          <p:cNvPr id="21" name="Group 21"/>
           <p:cNvGrpSpPr/>
           <p:nvPr/>
         </p:nvGrpSpPr>
         <p:grpSpPr>
-          <a:xfrm rot="0">
+          <a:xfrm>
             <a:off x="0" y="9930289"/>
             <a:ext cx="18288000" cy="356711"/>
             <a:chOff x="0" y="0"/>
@@ -6315,12 +6310,12 @@
         </p:grpSpPr>
         <p:sp>
           <p:nvSpPr>
-            <p:cNvPr name="Freeform 22" id="22"/>
+            <p:cNvPr id="22" name="Freeform 22"/>
             <p:cNvSpPr/>
             <p:nvPr/>
           </p:nvSpPr>
           <p:spPr>
-            <a:xfrm flipH="false" flipV="false" rot="0">
+            <a:xfrm>
               <a:off x="0" y="0"/>
               <a:ext cx="4816592" cy="93949"/>
             </a:xfrm>
@@ -6329,9 +6324,9 @@
               <a:gdLst/>
               <a:ahLst/>
               <a:cxnLst/>
-              <a:rect r="r" b="b" t="t" l="l"/>
+              <a:rect l="l" t="t" r="r" b="b"/>
               <a:pathLst>
-                <a:path h="93949" w="4816592">
+                <a:path w="4816592" h="93949">
                   <a:moveTo>
                     <a:pt x="0" y="0"/>
                   </a:moveTo>
@@ -6355,8 +6350,8 @@
         </p:sp>
         <p:sp>
           <p:nvSpPr>
-            <p:cNvPr name="TextBox 23" id="23"/>
-            <p:cNvSpPr txBox="true"/>
+            <p:cNvPr id="23" name="TextBox 23"/>
+            <p:cNvSpPr txBox="1"/>
             <p:nvPr/>
           </p:nvSpPr>
           <p:spPr>
@@ -6369,7 +6364,7 @@
             </a:prstGeom>
           </p:spPr>
           <p:txBody>
-            <a:bodyPr anchor="ctr" rtlCol="false" tIns="50800" lIns="50800" bIns="50800" rIns="50800"/>
+            <a:bodyPr lIns="50800" tIns="50800" rIns="50800" bIns="50800" rtlCol="0" anchor="ctr"/>
             <a:lstStyle/>
             <a:p>
               <a:pPr algn="ctr">
@@ -6377,18 +6372,19 @@
                   <a:spcPts val="2659"/>
                 </a:lnSpc>
               </a:pPr>
+              <a:endParaRPr/>
             </a:p>
           </p:txBody>
         </p:sp>
       </p:grpSp>
       <p:grpSp>
         <p:nvGrpSpPr>
-          <p:cNvPr name="Group 24" id="24"/>
+          <p:cNvPr id="24" name="Group 24"/>
           <p:cNvGrpSpPr/>
           <p:nvPr/>
         </p:nvGrpSpPr>
         <p:grpSpPr>
-          <a:xfrm rot="0">
+          <a:xfrm>
             <a:off x="1580119" y="6218939"/>
             <a:ext cx="4359465" cy="1948032"/>
             <a:chOff x="0" y="0"/>
@@ -6397,12 +6393,12 @@
         </p:grpSpPr>
         <p:sp>
           <p:nvSpPr>
-            <p:cNvPr name="Freeform 25" id="25"/>
+            <p:cNvPr id="25" name="Freeform 25"/>
             <p:cNvSpPr/>
             <p:nvPr/>
           </p:nvSpPr>
           <p:spPr>
-            <a:xfrm flipH="false" flipV="false" rot="0">
+            <a:xfrm>
               <a:off x="0" y="0"/>
               <a:ext cx="812800" cy="363201"/>
             </a:xfrm>
@@ -6411,9 +6407,9 @@
               <a:gdLst/>
               <a:ahLst/>
               <a:cxnLst/>
-              <a:rect r="r" b="b" t="t" l="l"/>
+              <a:rect l="l" t="t" r="r" b="b"/>
               <a:pathLst>
-                <a:path h="363201" w="812800">
+                <a:path w="812800" h="363201">
                   <a:moveTo>
                     <a:pt x="0" y="0"/>
                   </a:moveTo>
@@ -6437,8 +6433,8 @@
         </p:sp>
         <p:sp>
           <p:nvSpPr>
-            <p:cNvPr name="TextBox 26" id="26"/>
-            <p:cNvSpPr txBox="true"/>
+            <p:cNvPr id="26" name="TextBox 26"/>
+            <p:cNvSpPr txBox="1"/>
             <p:nvPr/>
           </p:nvSpPr>
           <p:spPr>
@@ -6451,7 +6447,7 @@
             </a:prstGeom>
           </p:spPr>
           <p:txBody>
-            <a:bodyPr anchor="ctr" rtlCol="false" tIns="50800" lIns="50800" bIns="50800" rIns="50800"/>
+            <a:bodyPr lIns="50800" tIns="50800" rIns="50800" bIns="50800" rtlCol="0" anchor="ctr"/>
             <a:lstStyle/>
             <a:p>
               <a:pPr algn="ctr">
@@ -6459,18 +6455,19 @@
                   <a:spcPts val="2520"/>
                 </a:lnSpc>
               </a:pPr>
+              <a:endParaRPr/>
             </a:p>
           </p:txBody>
         </p:sp>
       </p:grpSp>
       <p:grpSp>
         <p:nvGrpSpPr>
-          <p:cNvPr name="Group 27" id="27"/>
+          <p:cNvPr id="27" name="Group 27"/>
           <p:cNvGrpSpPr/>
           <p:nvPr/>
         </p:nvGrpSpPr>
         <p:grpSpPr>
-          <a:xfrm rot="0">
+          <a:xfrm>
             <a:off x="1421409" y="6034829"/>
             <a:ext cx="4359465" cy="1948032"/>
             <a:chOff x="0" y="0"/>
@@ -6479,12 +6476,12 @@
         </p:grpSpPr>
         <p:sp>
           <p:nvSpPr>
-            <p:cNvPr name="Freeform 28" id="28"/>
+            <p:cNvPr id="28" name="Freeform 28"/>
             <p:cNvSpPr/>
             <p:nvPr/>
           </p:nvSpPr>
           <p:spPr>
-            <a:xfrm flipH="false" flipV="false" rot="0">
+            <a:xfrm>
               <a:off x="0" y="0"/>
               <a:ext cx="812800" cy="363201"/>
             </a:xfrm>
@@ -6493,9 +6490,9 @@
               <a:gdLst/>
               <a:ahLst/>
               <a:cxnLst/>
-              <a:rect r="r" b="b" t="t" l="l"/>
+              <a:rect l="l" t="t" r="r" b="b"/>
               <a:pathLst>
-                <a:path h="363201" w="812800">
+                <a:path w="812800" h="363201">
                   <a:moveTo>
                     <a:pt x="0" y="0"/>
                   </a:moveTo>
@@ -6519,8 +6516,8 @@
         </p:sp>
         <p:sp>
           <p:nvSpPr>
-            <p:cNvPr name="TextBox 29" id="29"/>
-            <p:cNvSpPr txBox="true"/>
+            <p:cNvPr id="29" name="TextBox 29"/>
+            <p:cNvSpPr txBox="1"/>
             <p:nvPr/>
           </p:nvSpPr>
           <p:spPr>
@@ -6533,7 +6530,7 @@
             </a:prstGeom>
           </p:spPr>
           <p:txBody>
-            <a:bodyPr anchor="ctr" rtlCol="false" tIns="50800" lIns="50800" bIns="50800" rIns="50800"/>
+            <a:bodyPr lIns="50800" tIns="50800" rIns="50800" bIns="50800" rtlCol="0" anchor="ctr"/>
             <a:lstStyle/>
             <a:p>
               <a:pPr algn="ctr">
@@ -6541,18 +6538,19 @@
                   <a:spcPts val="2520"/>
                 </a:lnSpc>
               </a:pPr>
+              <a:endParaRPr/>
             </a:p>
           </p:txBody>
         </p:sp>
       </p:grpSp>
       <p:grpSp>
         <p:nvGrpSpPr>
-          <p:cNvPr name="Group 30" id="30"/>
+          <p:cNvPr id="30" name="Group 30"/>
           <p:cNvGrpSpPr/>
           <p:nvPr/>
         </p:nvGrpSpPr>
         <p:grpSpPr>
-          <a:xfrm rot="0">
+          <a:xfrm>
             <a:off x="6537504" y="6034829"/>
             <a:ext cx="4359465" cy="1948032"/>
             <a:chOff x="0" y="0"/>
@@ -6561,12 +6559,12 @@
         </p:grpSpPr>
         <p:sp>
           <p:nvSpPr>
-            <p:cNvPr name="Freeform 31" id="31"/>
+            <p:cNvPr id="31" name="Freeform 31"/>
             <p:cNvSpPr/>
             <p:nvPr/>
           </p:nvSpPr>
           <p:spPr>
-            <a:xfrm flipH="false" flipV="false" rot="0">
+            <a:xfrm>
               <a:off x="0" y="0"/>
               <a:ext cx="812800" cy="363201"/>
             </a:xfrm>
@@ -6575,9 +6573,9 @@
               <a:gdLst/>
               <a:ahLst/>
               <a:cxnLst/>
-              <a:rect r="r" b="b" t="t" l="l"/>
+              <a:rect l="l" t="t" r="r" b="b"/>
               <a:pathLst>
-                <a:path h="363201" w="812800">
+                <a:path w="812800" h="363201">
                   <a:moveTo>
                     <a:pt x="0" y="0"/>
                   </a:moveTo>
@@ -6601,8 +6599,8 @@
         </p:sp>
         <p:sp>
           <p:nvSpPr>
-            <p:cNvPr name="TextBox 32" id="32"/>
-            <p:cNvSpPr txBox="true"/>
+            <p:cNvPr id="32" name="TextBox 32"/>
+            <p:cNvSpPr txBox="1"/>
             <p:nvPr/>
           </p:nvSpPr>
           <p:spPr>
@@ -6615,7 +6613,7 @@
             </a:prstGeom>
           </p:spPr>
           <p:txBody>
-            <a:bodyPr anchor="ctr" rtlCol="false" tIns="50800" lIns="50800" bIns="50800" rIns="50800"/>
+            <a:bodyPr lIns="50800" tIns="50800" rIns="50800" bIns="50800" rtlCol="0" anchor="ctr"/>
             <a:lstStyle/>
             <a:p>
               <a:pPr algn="ctr">
@@ -6623,18 +6621,19 @@
                   <a:spcPts val="2520"/>
                 </a:lnSpc>
               </a:pPr>
+              <a:endParaRPr/>
             </a:p>
           </p:txBody>
         </p:sp>
       </p:grpSp>
       <p:grpSp>
         <p:nvGrpSpPr>
-          <p:cNvPr name="Group 33" id="33"/>
+          <p:cNvPr id="33" name="Group 33"/>
           <p:cNvGrpSpPr/>
           <p:nvPr/>
         </p:nvGrpSpPr>
         <p:grpSpPr>
-          <a:xfrm rot="0">
+          <a:xfrm>
             <a:off x="6743839" y="3762416"/>
             <a:ext cx="4359465" cy="1948032"/>
             <a:chOff x="0" y="0"/>
@@ -6643,12 +6642,12 @@
         </p:grpSpPr>
         <p:sp>
           <p:nvSpPr>
-            <p:cNvPr name="Freeform 34" id="34"/>
+            <p:cNvPr id="34" name="Freeform 34"/>
             <p:cNvSpPr/>
             <p:nvPr/>
           </p:nvSpPr>
           <p:spPr>
-            <a:xfrm flipH="false" flipV="false" rot="0">
+            <a:xfrm>
               <a:off x="0" y="0"/>
               <a:ext cx="812800" cy="363201"/>
             </a:xfrm>
@@ -6657,9 +6656,9 @@
               <a:gdLst/>
               <a:ahLst/>
               <a:cxnLst/>
-              <a:rect r="r" b="b" t="t" l="l"/>
+              <a:rect l="l" t="t" r="r" b="b"/>
               <a:pathLst>
-                <a:path h="363201" w="812800">
+                <a:path w="812800" h="363201">
                   <a:moveTo>
                     <a:pt x="0" y="0"/>
                   </a:moveTo>
@@ -6683,8 +6682,8 @@
         </p:sp>
         <p:sp>
           <p:nvSpPr>
-            <p:cNvPr name="TextBox 35" id="35"/>
-            <p:cNvSpPr txBox="true"/>
+            <p:cNvPr id="35" name="TextBox 35"/>
+            <p:cNvSpPr txBox="1"/>
             <p:nvPr/>
           </p:nvSpPr>
           <p:spPr>
@@ -6697,7 +6696,7 @@
             </a:prstGeom>
           </p:spPr>
           <p:txBody>
-            <a:bodyPr anchor="ctr" rtlCol="false" tIns="50800" lIns="50800" bIns="50800" rIns="50800"/>
+            <a:bodyPr lIns="50800" tIns="50800" rIns="50800" bIns="50800" rtlCol="0" anchor="ctr"/>
             <a:lstStyle/>
             <a:p>
               <a:pPr algn="ctr">
@@ -6705,18 +6704,19 @@
                   <a:spcPts val="2520"/>
                 </a:lnSpc>
               </a:pPr>
+              <a:endParaRPr/>
             </a:p>
           </p:txBody>
         </p:sp>
       </p:grpSp>
       <p:grpSp>
         <p:nvGrpSpPr>
-          <p:cNvPr name="Group 36" id="36"/>
+          <p:cNvPr id="36" name="Group 36"/>
           <p:cNvGrpSpPr/>
           <p:nvPr/>
         </p:nvGrpSpPr>
         <p:grpSpPr>
-          <a:xfrm rot="0">
+          <a:xfrm>
             <a:off x="6537504" y="3581651"/>
             <a:ext cx="4359465" cy="1948032"/>
             <a:chOff x="0" y="0"/>
@@ -6725,12 +6725,12 @@
         </p:grpSpPr>
         <p:sp>
           <p:nvSpPr>
-            <p:cNvPr name="Freeform 37" id="37"/>
+            <p:cNvPr id="37" name="Freeform 37"/>
             <p:cNvSpPr/>
             <p:nvPr/>
           </p:nvSpPr>
           <p:spPr>
-            <a:xfrm flipH="false" flipV="false" rot="0">
+            <a:xfrm>
               <a:off x="0" y="0"/>
               <a:ext cx="812800" cy="363201"/>
             </a:xfrm>
@@ -6739,9 +6739,9 @@
               <a:gdLst/>
               <a:ahLst/>
               <a:cxnLst/>
-              <a:rect r="r" b="b" t="t" l="l"/>
+              <a:rect l="l" t="t" r="r" b="b"/>
               <a:pathLst>
-                <a:path h="363201" w="812800">
+                <a:path w="812800" h="363201">
                   <a:moveTo>
                     <a:pt x="0" y="0"/>
                   </a:moveTo>
@@ -6765,8 +6765,8 @@
         </p:sp>
         <p:sp>
           <p:nvSpPr>
-            <p:cNvPr name="TextBox 38" id="38"/>
-            <p:cNvSpPr txBox="true"/>
+            <p:cNvPr id="38" name="TextBox 38"/>
+            <p:cNvSpPr txBox="1"/>
             <p:nvPr/>
           </p:nvSpPr>
           <p:spPr>
@@ -6779,7 +6779,7 @@
             </a:prstGeom>
           </p:spPr>
           <p:txBody>
-            <a:bodyPr anchor="ctr" rtlCol="false" tIns="50800" lIns="50800" bIns="50800" rIns="50800"/>
+            <a:bodyPr lIns="50800" tIns="50800" rIns="50800" bIns="50800" rtlCol="0" anchor="ctr"/>
             <a:lstStyle/>
             <a:p>
               <a:pPr algn="ctr">
@@ -6787,18 +6787,19 @@
                   <a:spcPts val="2520"/>
                 </a:lnSpc>
               </a:pPr>
+              <a:endParaRPr/>
             </a:p>
           </p:txBody>
         </p:sp>
       </p:grpSp>
       <p:sp>
         <p:nvSpPr>
-          <p:cNvPr name="TextBox 39" id="39"/>
-          <p:cNvSpPr txBox="true"/>
+          <p:cNvPr id="39" name="TextBox 39"/>
+          <p:cNvSpPr txBox="1"/>
           <p:nvPr/>
         </p:nvSpPr>
         <p:spPr>
-          <a:xfrm rot="0">
+          <a:xfrm>
             <a:off x="811390" y="1322955"/>
             <a:ext cx="11018069" cy="1515746"/>
           </a:xfrm>
@@ -6807,7 +6808,7 @@
           </a:prstGeom>
         </p:spPr>
         <p:txBody>
-          <a:bodyPr anchor="t" rtlCol="false" tIns="0" lIns="0" bIns="0" rIns="0">
+          <a:bodyPr lIns="0" tIns="0" rIns="0" bIns="0" rtlCol="0" anchor="t">
             <a:spAutoFit/>
           </a:bodyPr>
           <a:lstStyle/>
@@ -6837,12 +6838,12 @@
       </p:sp>
       <p:sp>
         <p:nvSpPr>
-          <p:cNvPr name="TextBox 40" id="40"/>
-          <p:cNvSpPr txBox="true"/>
+          <p:cNvPr id="40" name="TextBox 40"/>
+          <p:cNvSpPr txBox="1"/>
           <p:nvPr/>
         </p:nvSpPr>
         <p:spPr>
-          <a:xfrm rot="0">
+          <a:xfrm>
             <a:off x="1627744" y="3745074"/>
             <a:ext cx="3946796" cy="1544985"/>
           </a:xfrm>
@@ -6851,7 +6852,7 @@
           </a:prstGeom>
         </p:spPr>
         <p:txBody>
-          <a:bodyPr anchor="t" rtlCol="false" tIns="0" lIns="0" bIns="0" rIns="0">
+          <a:bodyPr lIns="0" tIns="0" rIns="0" bIns="0" rtlCol="0" anchor="t">
             <a:spAutoFit/>
           </a:bodyPr>
           <a:lstStyle/>
@@ -6865,7 +6866,7 @@
               </a:spcBef>
             </a:pPr>
             <a:r>
-              <a:rPr lang="en-US" b="true" sz="2923" spc="-58">
+              <a:rPr lang="en-US" sz="2923" b="1" spc="-58">
                 <a:solidFill>
                   <a:srgbClr val="000000"/>
                 </a:solidFill>
@@ -6881,12 +6882,12 @@
       </p:sp>
       <p:sp>
         <p:nvSpPr>
-          <p:cNvPr name="TextBox 41" id="41"/>
-          <p:cNvSpPr txBox="true"/>
+          <p:cNvPr id="41" name="TextBox 41"/>
+          <p:cNvSpPr txBox="1"/>
           <p:nvPr/>
         </p:nvSpPr>
         <p:spPr>
-          <a:xfrm rot="0">
+          <a:xfrm>
             <a:off x="6743839" y="3745074"/>
             <a:ext cx="3946796" cy="1544985"/>
           </a:xfrm>
@@ -6895,7 +6896,7 @@
           </a:prstGeom>
         </p:spPr>
         <p:txBody>
-          <a:bodyPr anchor="t" rtlCol="false" tIns="0" lIns="0" bIns="0" rIns="0">
+          <a:bodyPr lIns="0" tIns="0" rIns="0" bIns="0" rtlCol="0" anchor="t">
             <a:spAutoFit/>
           </a:bodyPr>
           <a:lstStyle/>
@@ -6909,7 +6910,7 @@
               </a:spcBef>
             </a:pPr>
             <a:r>
-              <a:rPr lang="en-US" b="true" sz="2923" spc="-58">
+              <a:rPr lang="en-US" sz="2923" b="1" spc="-58">
                 <a:solidFill>
                   <a:srgbClr val="000000"/>
                 </a:solidFill>
@@ -6925,12 +6926,12 @@
       </p:sp>
       <p:sp>
         <p:nvSpPr>
-          <p:cNvPr name="TextBox 42" id="42"/>
-          <p:cNvSpPr txBox="true"/>
+          <p:cNvPr id="42" name="TextBox 42"/>
+          <p:cNvSpPr txBox="1"/>
           <p:nvPr/>
         </p:nvSpPr>
         <p:spPr>
-          <a:xfrm rot="0">
+          <a:xfrm>
             <a:off x="1627744" y="6160892"/>
             <a:ext cx="3946796" cy="1544985"/>
           </a:xfrm>
@@ -6939,7 +6940,7 @@
           </a:prstGeom>
         </p:spPr>
         <p:txBody>
-          <a:bodyPr anchor="t" rtlCol="false" tIns="0" lIns="0" bIns="0" rIns="0">
+          <a:bodyPr lIns="0" tIns="0" rIns="0" bIns="0" rtlCol="0" anchor="t">
             <a:spAutoFit/>
           </a:bodyPr>
           <a:lstStyle/>
@@ -6953,7 +6954,7 @@
               </a:spcBef>
             </a:pPr>
             <a:r>
-              <a:rPr lang="en-US" b="true" sz="2923" spc="-58">
+              <a:rPr lang="en-US" sz="2923" b="1" spc="-58">
                 <a:solidFill>
                   <a:srgbClr val="000000"/>
                 </a:solidFill>
@@ -6969,12 +6970,12 @@
       </p:sp>
       <p:sp>
         <p:nvSpPr>
-          <p:cNvPr name="TextBox 43" id="43"/>
-          <p:cNvSpPr txBox="true"/>
+          <p:cNvPr id="43" name="TextBox 43"/>
+          <p:cNvSpPr txBox="1"/>
           <p:nvPr/>
         </p:nvSpPr>
         <p:spPr>
-          <a:xfrm rot="0">
+          <a:xfrm>
             <a:off x="6743839" y="6198252"/>
             <a:ext cx="3946796" cy="1544985"/>
           </a:xfrm>
@@ -6983,7 +6984,7 @@
           </a:prstGeom>
         </p:spPr>
         <p:txBody>
-          <a:bodyPr anchor="t" rtlCol="false" tIns="0" lIns="0" bIns="0" rIns="0">
+          <a:bodyPr lIns="0" tIns="0" rIns="0" bIns="0" rtlCol="0" anchor="t">
             <a:spAutoFit/>
           </a:bodyPr>
           <a:lstStyle/>
@@ -6997,7 +6998,7 @@
               </a:spcBef>
             </a:pPr>
             <a:r>
-              <a:rPr lang="en-US" b="true" sz="2923" spc="-58">
+              <a:rPr lang="en-US" sz="2923" b="1" spc="-58">
                 <a:solidFill>
                   <a:srgbClr val="000000"/>
                 </a:solidFill>
@@ -7020,7 +7021,7 @@
 </file>
 
 <file path=ppt/slides/slide6.xml><?xml version="1.0" encoding="utf-8"?>
-<p:sld xmlns:p="http://schemas.openxmlformats.org/presentationml/2006/main" xmlns:a="http://schemas.openxmlformats.org/drawingml/2006/main" xmlns:r="http://schemas.openxmlformats.org/officeDocument/2006/relationships">
+<p:sld xmlns:a="http://schemas.openxmlformats.org/drawingml/2006/main" xmlns:r="http://schemas.openxmlformats.org/officeDocument/2006/relationships" xmlns:p="http://schemas.openxmlformats.org/presentationml/2006/main">
   <p:cSld>
     <p:spTree>
       <p:nvGrpSpPr>
@@ -7038,12 +7039,12 @@
       </p:grpSpPr>
       <p:sp>
         <p:nvSpPr>
-          <p:cNvPr name="Freeform 2" id="2"/>
+          <p:cNvPr id="2" name="Freeform 2"/>
           <p:cNvSpPr/>
           <p:nvPr/>
         </p:nvSpPr>
         <p:spPr>
-          <a:xfrm flipH="false" flipV="false" rot="0">
+          <a:xfrm>
             <a:off x="0" y="0"/>
             <a:ext cx="18288000" cy="10287000"/>
           </a:xfrm>
@@ -7052,9 +7053,9 @@
             <a:gdLst/>
             <a:ahLst/>
             <a:cxnLst/>
-            <a:rect r="r" b="b" t="t" l="l"/>
+            <a:rect l="l" t="t" r="r" b="b"/>
             <a:pathLst>
-              <a:path h="10287000" w="18288000">
+              <a:path w="18288000" h="10287000">
                 <a:moveTo>
                   <a:pt x="0" y="0"/>
                 </a:moveTo>
@@ -7077,19 +7078,19 @@
           <a:blipFill>
             <a:blip r:embed="rId2"/>
             <a:stretch>
-              <a:fillRect l="-29412" t="0" r="0" b="-29412"/>
+              <a:fillRect l="-29412" b="-29412"/>
             </a:stretch>
           </a:blipFill>
         </p:spPr>
       </p:sp>
       <p:sp>
         <p:nvSpPr>
-          <p:cNvPr name="Freeform 3" id="3"/>
+          <p:cNvPr id="3" name="Freeform 3"/>
           <p:cNvSpPr/>
           <p:nvPr/>
         </p:nvSpPr>
         <p:spPr>
-          <a:xfrm flipH="false" flipV="true" rot="0">
+          <a:xfrm flipV="1">
             <a:off x="0" y="-1315418"/>
             <a:ext cx="20044460" cy="2630835"/>
           </a:xfrm>
@@ -7098,9 +7099,9 @@
             <a:gdLst/>
             <a:ahLst/>
             <a:cxnLst/>
-            <a:rect r="r" b="b" t="t" l="l"/>
+            <a:rect l="l" t="t" r="r" b="b"/>
             <a:pathLst>
-              <a:path h="2630835" w="20044460">
+              <a:path w="20044460" h="2630835">
                 <a:moveTo>
                   <a:pt x="0" y="2630836"/>
                 </a:moveTo>
@@ -7121,8 +7122,60 @@
             </a:pathLst>
           </a:custGeom>
           <a:blipFill>
-            <a:blip r:embed="rId3">
+            <a:blip>
               <a:alphaModFix amt="9999"/>
+              <a:extLst>
+                <a:ext uri="{96DAC541-7B7A-43D3-8B79-37D633B846F1}">
+                  <asvg:svgBlip xmlns:asvg="http://schemas.microsoft.com/office/drawing/2016/SVG/main" r:embed="rId3"/>
+                </a:ext>
+              </a:extLst>
+            </a:blip>
+            <a:stretch>
+              <a:fillRect/>
+            </a:stretch>
+          </a:blipFill>
+        </p:spPr>
+      </p:sp>
+      <p:sp>
+        <p:nvSpPr>
+          <p:cNvPr id="4" name="Freeform 4"/>
+          <p:cNvSpPr/>
+          <p:nvPr/>
+        </p:nvSpPr>
+        <p:spPr>
+          <a:xfrm rot="-5400000">
+            <a:off x="13505761" y="-2160696"/>
+            <a:ext cx="3892438" cy="5672041"/>
+          </a:xfrm>
+          <a:custGeom>
+            <a:avLst/>
+            <a:gdLst/>
+            <a:ahLst/>
+            <a:cxnLst/>
+            <a:rect l="l" t="t" r="r" b="b"/>
+            <a:pathLst>
+              <a:path w="3892438" h="5672041">
+                <a:moveTo>
+                  <a:pt x="0" y="0"/>
+                </a:moveTo>
+                <a:lnTo>
+                  <a:pt x="3892438" y="0"/>
+                </a:lnTo>
+                <a:lnTo>
+                  <a:pt x="3892438" y="5672040"/>
+                </a:lnTo>
+                <a:lnTo>
+                  <a:pt x="0" y="5672040"/>
+                </a:lnTo>
+                <a:lnTo>
+                  <a:pt x="0" y="0"/>
+                </a:lnTo>
+                <a:close/>
+              </a:path>
+            </a:pathLst>
+          </a:custGeom>
+          <a:blipFill>
+            <a:blip>
               <a:extLst>
                 <a:ext uri="{96DAC541-7B7A-43D3-8B79-37D633B846F1}">
                   <asvg:svgBlip xmlns:asvg="http://schemas.microsoft.com/office/drawing/2016/SVG/main" r:embed="rId4"/>
@@ -7130,20 +7183,20 @@
               </a:extLst>
             </a:blip>
             <a:stretch>
-              <a:fillRect l="0" t="0" r="0" b="0"/>
+              <a:fillRect/>
             </a:stretch>
           </a:blipFill>
         </p:spPr>
       </p:sp>
       <p:sp>
         <p:nvSpPr>
-          <p:cNvPr name="Freeform 4" id="4"/>
+          <p:cNvPr id="5" name="Freeform 5"/>
           <p:cNvSpPr/>
           <p:nvPr/>
         </p:nvSpPr>
         <p:spPr>
-          <a:xfrm flipH="false" flipV="false" rot="-5400000">
-            <a:off x="13505761" y="-2160696"/>
+          <a:xfrm rot="-5400000" flipV="1">
+            <a:off x="889801" y="-2160696"/>
             <a:ext cx="3892438" cy="5672041"/>
           </a:xfrm>
           <a:custGeom>
@@ -7151,135 +7204,30 @@
             <a:gdLst/>
             <a:ahLst/>
             <a:cxnLst/>
-            <a:rect r="r" b="b" t="t" l="l"/>
+            <a:rect l="l" t="t" r="r" b="b"/>
             <a:pathLst>
-              <a:path h="5672041" w="3892438">
+              <a:path w="3892438" h="5672041">
                 <a:moveTo>
+                  <a:pt x="0" y="5672040"/>
+                </a:moveTo>
+                <a:lnTo>
+                  <a:pt x="3892438" y="5672040"/>
+                </a:lnTo>
+                <a:lnTo>
+                  <a:pt x="3892438" y="0"/>
+                </a:lnTo>
+                <a:lnTo>
                   <a:pt x="0" y="0"/>
-                </a:moveTo>
-                <a:lnTo>
-                  <a:pt x="3892438" y="0"/>
-                </a:lnTo>
-                <a:lnTo>
-                  <a:pt x="3892438" y="5672040"/>
                 </a:lnTo>
                 <a:lnTo>
                   <a:pt x="0" y="5672040"/>
-                </a:lnTo>
-                <a:lnTo>
-                  <a:pt x="0" y="0"/>
                 </a:lnTo>
                 <a:close/>
               </a:path>
             </a:pathLst>
           </a:custGeom>
           <a:blipFill>
-            <a:blip r:embed="rId5">
-              <a:extLst>
-                <a:ext uri="{96DAC541-7B7A-43D3-8B79-37D633B846F1}">
-                  <asvg:svgBlip xmlns:asvg="http://schemas.microsoft.com/office/drawing/2016/SVG/main" r:embed="rId6"/>
-                </a:ext>
-              </a:extLst>
-            </a:blip>
-            <a:stretch>
-              <a:fillRect l="0" t="0" r="0" b="0"/>
-            </a:stretch>
-          </a:blipFill>
-        </p:spPr>
-      </p:sp>
-      <p:sp>
-        <p:nvSpPr>
-          <p:cNvPr name="Freeform 5" id="5"/>
-          <p:cNvSpPr/>
-          <p:nvPr/>
-        </p:nvSpPr>
-        <p:spPr>
-          <a:xfrm flipH="false" flipV="true" rot="-5400000">
-            <a:off x="889801" y="-2160696"/>
-            <a:ext cx="3892438" cy="5672041"/>
-          </a:xfrm>
-          <a:custGeom>
-            <a:avLst/>
-            <a:gdLst/>
-            <a:ahLst/>
-            <a:cxnLst/>
-            <a:rect r="r" b="b" t="t" l="l"/>
-            <a:pathLst>
-              <a:path h="5672041" w="3892438">
-                <a:moveTo>
-                  <a:pt x="0" y="5672040"/>
-                </a:moveTo>
-                <a:lnTo>
-                  <a:pt x="3892438" y="5672040"/>
-                </a:lnTo>
-                <a:lnTo>
-                  <a:pt x="3892438" y="0"/>
-                </a:lnTo>
-                <a:lnTo>
-                  <a:pt x="0" y="0"/>
-                </a:lnTo>
-                <a:lnTo>
-                  <a:pt x="0" y="5672040"/>
-                </a:lnTo>
-                <a:close/>
-              </a:path>
-            </a:pathLst>
-          </a:custGeom>
-          <a:blipFill>
-            <a:blip r:embed="rId5">
-              <a:extLst>
-                <a:ext uri="{96DAC541-7B7A-43D3-8B79-37D633B846F1}">
-                  <asvg:svgBlip xmlns:asvg="http://schemas.microsoft.com/office/drawing/2016/SVG/main" r:embed="rId6"/>
-                </a:ext>
-              </a:extLst>
-            </a:blip>
-            <a:stretch>
-              <a:fillRect l="0" t="0" r="0" b="0"/>
-            </a:stretch>
-          </a:blipFill>
-        </p:spPr>
-      </p:sp>
-      <p:sp>
-        <p:nvSpPr>
-          <p:cNvPr name="Freeform 6" id="6"/>
-          <p:cNvSpPr/>
-          <p:nvPr/>
-        </p:nvSpPr>
-        <p:spPr>
-          <a:xfrm flipH="false" flipV="false" rot="0">
-            <a:off x="-1756460" y="8867605"/>
-            <a:ext cx="20044460" cy="2630835"/>
-          </a:xfrm>
-          <a:custGeom>
-            <a:avLst/>
-            <a:gdLst/>
-            <a:ahLst/>
-            <a:cxnLst/>
-            <a:rect r="r" b="b" t="t" l="l"/>
-            <a:pathLst>
-              <a:path h="2630835" w="20044460">
-                <a:moveTo>
-                  <a:pt x="0" y="0"/>
-                </a:moveTo>
-                <a:lnTo>
-                  <a:pt x="20044460" y="0"/>
-                </a:lnTo>
-                <a:lnTo>
-                  <a:pt x="20044460" y="2630836"/>
-                </a:lnTo>
-                <a:lnTo>
-                  <a:pt x="0" y="2630836"/>
-                </a:lnTo>
-                <a:lnTo>
-                  <a:pt x="0" y="0"/>
-                </a:lnTo>
-                <a:close/>
-              </a:path>
-            </a:pathLst>
-          </a:custGeom>
-          <a:blipFill>
-            <a:blip r:embed="rId3">
-              <a:alphaModFix amt="9999"/>
+            <a:blip>
               <a:extLst>
                 <a:ext uri="{96DAC541-7B7A-43D3-8B79-37D633B846F1}">
                   <asvg:svgBlip xmlns:asvg="http://schemas.microsoft.com/office/drawing/2016/SVG/main" r:embed="rId4"/>
@@ -7287,19 +7235,72 @@
               </a:extLst>
             </a:blip>
             <a:stretch>
-              <a:fillRect l="0" t="0" r="0" b="0"/>
+              <a:fillRect/>
             </a:stretch>
           </a:blipFill>
         </p:spPr>
       </p:sp>
+      <p:sp>
+        <p:nvSpPr>
+          <p:cNvPr id="6" name="Freeform 6"/>
+          <p:cNvSpPr/>
+          <p:nvPr/>
+        </p:nvSpPr>
+        <p:spPr>
+          <a:xfrm>
+            <a:off x="-1756460" y="8867605"/>
+            <a:ext cx="20044460" cy="2630835"/>
+          </a:xfrm>
+          <a:custGeom>
+            <a:avLst/>
+            <a:gdLst/>
+            <a:ahLst/>
+            <a:cxnLst/>
+            <a:rect l="l" t="t" r="r" b="b"/>
+            <a:pathLst>
+              <a:path w="20044460" h="2630835">
+                <a:moveTo>
+                  <a:pt x="0" y="0"/>
+                </a:moveTo>
+                <a:lnTo>
+                  <a:pt x="20044460" y="0"/>
+                </a:lnTo>
+                <a:lnTo>
+                  <a:pt x="20044460" y="2630836"/>
+                </a:lnTo>
+                <a:lnTo>
+                  <a:pt x="0" y="2630836"/>
+                </a:lnTo>
+                <a:lnTo>
+                  <a:pt x="0" y="0"/>
+                </a:lnTo>
+                <a:close/>
+              </a:path>
+            </a:pathLst>
+          </a:custGeom>
+          <a:blipFill>
+            <a:blip>
+              <a:alphaModFix amt="9999"/>
+              <a:extLst>
+                <a:ext uri="{96DAC541-7B7A-43D3-8B79-37D633B846F1}">
+                  <asvg:svgBlip xmlns:asvg="http://schemas.microsoft.com/office/drawing/2016/SVG/main" r:embed="rId3"/>
+                </a:ext>
+              </a:extLst>
+            </a:blip>
+            <a:stretch>
+              <a:fillRect/>
+            </a:stretch>
+          </a:blipFill>
+        </p:spPr>
+      </p:sp>
       <p:grpSp>
         <p:nvGrpSpPr>
-          <p:cNvPr name="Group 7" id="7"/>
+          <p:cNvPr id="7" name="Group 7"/>
           <p:cNvGrpSpPr/>
           <p:nvPr/>
         </p:nvGrpSpPr>
         <p:grpSpPr>
-          <a:xfrm rot="0">
+          <a:xfrm>
             <a:off x="0" y="9930289"/>
             <a:ext cx="18288000" cy="356711"/>
             <a:chOff x="0" y="0"/>
@@ -7308,12 +7309,12 @@
         </p:grpSpPr>
         <p:sp>
           <p:nvSpPr>
-            <p:cNvPr name="Freeform 8" id="8"/>
+            <p:cNvPr id="8" name="Freeform 8"/>
             <p:cNvSpPr/>
             <p:nvPr/>
           </p:nvSpPr>
           <p:spPr>
-            <a:xfrm flipH="false" flipV="false" rot="0">
+            <a:xfrm>
               <a:off x="0" y="0"/>
               <a:ext cx="4816592" cy="93949"/>
             </a:xfrm>
@@ -7322,9 +7323,9 @@
               <a:gdLst/>
               <a:ahLst/>
               <a:cxnLst/>
-              <a:rect r="r" b="b" t="t" l="l"/>
+              <a:rect l="l" t="t" r="r" b="b"/>
               <a:pathLst>
-                <a:path h="93949" w="4816592">
+                <a:path w="4816592" h="93949">
                   <a:moveTo>
                     <a:pt x="0" y="0"/>
                   </a:moveTo>
@@ -7348,8 +7349,8 @@
         </p:sp>
         <p:sp>
           <p:nvSpPr>
-            <p:cNvPr name="TextBox 9" id="9"/>
-            <p:cNvSpPr txBox="true"/>
+            <p:cNvPr id="9" name="TextBox 9"/>
+            <p:cNvSpPr txBox="1"/>
             <p:nvPr/>
           </p:nvSpPr>
           <p:spPr>
@@ -7362,7 +7363,7 @@
             </a:prstGeom>
           </p:spPr>
           <p:txBody>
-            <a:bodyPr anchor="ctr" rtlCol="false" tIns="50800" lIns="50800" bIns="50800" rIns="50800"/>
+            <a:bodyPr lIns="50800" tIns="50800" rIns="50800" bIns="50800" rtlCol="0" anchor="ctr"/>
             <a:lstStyle/>
             <a:p>
               <a:pPr algn="ctr">
@@ -7370,18 +7371,19 @@
                   <a:spcPts val="2659"/>
                 </a:lnSpc>
               </a:pPr>
+              <a:endParaRPr/>
             </a:p>
           </p:txBody>
         </p:sp>
       </p:grpSp>
       <p:sp>
         <p:nvSpPr>
-          <p:cNvPr name="TextBox 10" id="10"/>
-          <p:cNvSpPr txBox="true"/>
+          <p:cNvPr id="10" name="TextBox 10"/>
+          <p:cNvSpPr txBox="1"/>
           <p:nvPr/>
         </p:nvSpPr>
         <p:spPr>
-          <a:xfrm rot="0">
+          <a:xfrm>
             <a:off x="1028700" y="876300"/>
             <a:ext cx="15730940" cy="1343406"/>
           </a:xfrm>
@@ -7390,7 +7392,7 @@
           </a:prstGeom>
         </p:spPr>
         <p:txBody>
-          <a:bodyPr anchor="t" rtlCol="false" tIns="0" lIns="0" bIns="0" rIns="0">
+          <a:bodyPr lIns="0" tIns="0" rIns="0" bIns="0" rtlCol="0" anchor="t">
             <a:spAutoFit/>
           </a:bodyPr>
           <a:lstStyle/>
@@ -7420,12 +7422,12 @@
       </p:sp>
       <p:sp>
         <p:nvSpPr>
-          <p:cNvPr name="Freeform 11" id="11"/>
+          <p:cNvPr id="11" name="Freeform 11"/>
           <p:cNvSpPr/>
           <p:nvPr/>
         </p:nvSpPr>
         <p:spPr>
-          <a:xfrm flipH="false" flipV="false" rot="5400000">
+          <a:xfrm rot="5400000">
             <a:off x="889801" y="6422280"/>
             <a:ext cx="3892438" cy="5672041"/>
           </a:xfrm>
@@ -7434,9 +7436,9 @@
             <a:gdLst/>
             <a:ahLst/>
             <a:cxnLst/>
-            <a:rect r="r" b="b" t="t" l="l"/>
+            <a:rect l="l" t="t" r="r" b="b"/>
             <a:pathLst>
-              <a:path h="5672041" w="3892438">
+              <a:path w="3892438" h="5672041">
                 <a:moveTo>
                   <a:pt x="0" y="0"/>
                 </a:moveTo>
@@ -7457,27 +7459,27 @@
             </a:pathLst>
           </a:custGeom>
           <a:blipFill>
-            <a:blip r:embed="rId5">
+            <a:blip>
               <a:extLst>
                 <a:ext uri="{96DAC541-7B7A-43D3-8B79-37D633B846F1}">
-                  <asvg:svgBlip xmlns:asvg="http://schemas.microsoft.com/office/drawing/2016/SVG/main" r:embed="rId6"/>
+                  <asvg:svgBlip xmlns:asvg="http://schemas.microsoft.com/office/drawing/2016/SVG/main" r:embed="rId4"/>
                 </a:ext>
               </a:extLst>
             </a:blip>
             <a:stretch>
-              <a:fillRect l="0" t="0" r="0" b="0"/>
+              <a:fillRect/>
             </a:stretch>
           </a:blipFill>
         </p:spPr>
       </p:sp>
       <p:sp>
         <p:nvSpPr>
-          <p:cNvPr name="Freeform 12" id="12"/>
+          <p:cNvPr id="12" name="Freeform 12"/>
           <p:cNvSpPr/>
           <p:nvPr/>
         </p:nvSpPr>
         <p:spPr>
-          <a:xfrm flipH="false" flipV="true" rot="5400000">
+          <a:xfrm rot="5400000" flipV="1">
             <a:off x="13505761" y="6422280"/>
             <a:ext cx="3892438" cy="5672041"/>
           </a:xfrm>
@@ -7486,9 +7488,9 @@
             <a:gdLst/>
             <a:ahLst/>
             <a:cxnLst/>
-            <a:rect r="r" b="b" t="t" l="l"/>
+            <a:rect l="l" t="t" r="r" b="b"/>
             <a:pathLst>
-              <a:path h="5672041" w="3892438">
+              <a:path w="3892438" h="5672041">
                 <a:moveTo>
                   <a:pt x="0" y="5672040"/>
                 </a:moveTo>
@@ -7509,27 +7511,27 @@
             </a:pathLst>
           </a:custGeom>
           <a:blipFill>
-            <a:blip r:embed="rId5">
+            <a:blip>
               <a:extLst>
                 <a:ext uri="{96DAC541-7B7A-43D3-8B79-37D633B846F1}">
-                  <asvg:svgBlip xmlns:asvg="http://schemas.microsoft.com/office/drawing/2016/SVG/main" r:embed="rId6"/>
+                  <asvg:svgBlip xmlns:asvg="http://schemas.microsoft.com/office/drawing/2016/SVG/main" r:embed="rId4"/>
                 </a:ext>
               </a:extLst>
             </a:blip>
             <a:stretch>
-              <a:fillRect l="0" t="0" r="0" b="0"/>
+              <a:fillRect/>
             </a:stretch>
           </a:blipFill>
         </p:spPr>
       </p:sp>
       <p:sp>
         <p:nvSpPr>
-          <p:cNvPr name="TextBox 13" id="13"/>
-          <p:cNvSpPr txBox="true"/>
+          <p:cNvPr id="13" name="TextBox 13"/>
+          <p:cNvSpPr txBox="1"/>
           <p:nvPr/>
         </p:nvSpPr>
         <p:spPr>
-          <a:xfrm rot="0">
+          <a:xfrm>
             <a:off x="729592" y="2453186"/>
             <a:ext cx="16828815" cy="5451748"/>
           </a:xfrm>
@@ -7538,7 +7540,7 @@
           </a:prstGeom>
         </p:spPr>
         <p:txBody>
-          <a:bodyPr anchor="t" rtlCol="false" tIns="0" lIns="0" bIns="0" rIns="0">
+          <a:bodyPr lIns="0" tIns="0" rIns="0" bIns="0" rtlCol="0" anchor="t">
             <a:spAutoFit/>
           </a:bodyPr>
           <a:lstStyle/>
@@ -7552,7 +7554,7 @@
               </a:spcBef>
             </a:pPr>
             <a:r>
-              <a:rPr lang="en-US" b="true" sz="5114">
+              <a:rPr lang="en-US" sz="5114" b="1">
                 <a:solidFill>
                   <a:srgbClr val="FFFFFF"/>
                 </a:solidFill>
@@ -7575,7 +7577,7 @@
 </file>
 
 <file path=ppt/slides/slide7.xml><?xml version="1.0" encoding="utf-8"?>
-<p:sld xmlns:p="http://schemas.openxmlformats.org/presentationml/2006/main" xmlns:a="http://schemas.openxmlformats.org/drawingml/2006/main" xmlns:r="http://schemas.openxmlformats.org/officeDocument/2006/relationships">
+<p:sld xmlns:a="http://schemas.openxmlformats.org/drawingml/2006/main" xmlns:r="http://schemas.openxmlformats.org/officeDocument/2006/relationships" xmlns:p="http://schemas.openxmlformats.org/presentationml/2006/main">
   <p:cSld>
     <p:spTree>
       <p:nvGrpSpPr>
@@ -7593,12 +7595,12 @@
       </p:grpSpPr>
       <p:sp>
         <p:nvSpPr>
-          <p:cNvPr name="Freeform 2" id="2"/>
+          <p:cNvPr id="2" name="Freeform 2"/>
           <p:cNvSpPr/>
           <p:nvPr/>
         </p:nvSpPr>
         <p:spPr>
-          <a:xfrm flipH="false" flipV="false" rot="0">
+          <a:xfrm>
             <a:off x="0" y="0"/>
             <a:ext cx="18288000" cy="10287000"/>
           </a:xfrm>
@@ -7607,9 +7609,9 @@
             <a:gdLst/>
             <a:ahLst/>
             <a:cxnLst/>
-            <a:rect r="r" b="b" t="t" l="l"/>
+            <a:rect l="l" t="t" r="r" b="b"/>
             <a:pathLst>
-              <a:path h="10287000" w="18288000">
+              <a:path w="18288000" h="10287000">
                 <a:moveTo>
                   <a:pt x="0" y="0"/>
                 </a:moveTo>
@@ -7632,19 +7634,19 @@
           <a:blipFill>
             <a:blip r:embed="rId2"/>
             <a:stretch>
-              <a:fillRect l="-53562" t="0" r="0" b="-53562"/>
+              <a:fillRect l="-53562" b="-53562"/>
             </a:stretch>
           </a:blipFill>
         </p:spPr>
       </p:sp>
       <p:sp>
         <p:nvSpPr>
-          <p:cNvPr name="TextBox 3" id="3"/>
-          <p:cNvSpPr txBox="true"/>
+          <p:cNvPr id="3" name="TextBox 3"/>
+          <p:cNvSpPr txBox="1"/>
           <p:nvPr/>
         </p:nvSpPr>
         <p:spPr>
-          <a:xfrm rot="0">
+          <a:xfrm>
             <a:off x="3222628" y="2252253"/>
             <a:ext cx="11842744" cy="2749033"/>
           </a:xfrm>
@@ -7653,7 +7655,7 @@
           </a:prstGeom>
         </p:spPr>
         <p:txBody>
-          <a:bodyPr anchor="t" rtlCol="false" tIns="0" lIns="0" bIns="0" rIns="0">
+          <a:bodyPr lIns="0" tIns="0" rIns="0" bIns="0" rtlCol="0" anchor="t">
             <a:spAutoFit/>
           </a:bodyPr>
           <a:lstStyle/>
@@ -7683,12 +7685,12 @@
       </p:sp>
       <p:sp>
         <p:nvSpPr>
-          <p:cNvPr name="TextBox 4" id="4"/>
-          <p:cNvSpPr txBox="true"/>
+          <p:cNvPr id="4" name="TextBox 4"/>
+          <p:cNvSpPr txBox="1"/>
           <p:nvPr/>
         </p:nvSpPr>
         <p:spPr>
-          <a:xfrm rot="0">
+          <a:xfrm>
             <a:off x="3311099" y="4397098"/>
             <a:ext cx="11665802" cy="2914983"/>
           </a:xfrm>
@@ -7697,7 +7699,7 @@
           </a:prstGeom>
         </p:spPr>
         <p:txBody>
-          <a:bodyPr anchor="t" rtlCol="false" tIns="0" lIns="0" bIns="0" rIns="0">
+          <a:bodyPr lIns="0" tIns="0" rIns="0" bIns="0" rtlCol="0" anchor="t">
             <a:spAutoFit/>
           </a:bodyPr>
           <a:lstStyle/>
@@ -7727,12 +7729,12 @@
       </p:sp>
       <p:sp>
         <p:nvSpPr>
-          <p:cNvPr name="Freeform 5" id="5"/>
+          <p:cNvPr id="5" name="Freeform 5"/>
           <p:cNvSpPr/>
           <p:nvPr/>
         </p:nvSpPr>
         <p:spPr>
-          <a:xfrm flipH="false" flipV="true" rot="0">
+          <a:xfrm flipV="1">
             <a:off x="0" y="-1315418"/>
             <a:ext cx="20044460" cy="2630835"/>
           </a:xfrm>
@@ -7741,9 +7743,9 @@
             <a:gdLst/>
             <a:ahLst/>
             <a:cxnLst/>
-            <a:rect r="r" b="b" t="t" l="l"/>
+            <a:rect l="l" t="t" r="r" b="b"/>
             <a:pathLst>
-              <a:path h="2630835" w="20044460">
+              <a:path w="20044460" h="2630835">
                 <a:moveTo>
                   <a:pt x="0" y="2630836"/>
                 </a:moveTo>
@@ -7764,8 +7766,60 @@
             </a:pathLst>
           </a:custGeom>
           <a:blipFill>
-            <a:blip r:embed="rId3">
+            <a:blip>
               <a:alphaModFix amt="9999"/>
+              <a:extLst>
+                <a:ext uri="{96DAC541-7B7A-43D3-8B79-37D633B846F1}">
+                  <asvg:svgBlip xmlns:asvg="http://schemas.microsoft.com/office/drawing/2016/SVG/main" r:embed="rId3"/>
+                </a:ext>
+              </a:extLst>
+            </a:blip>
+            <a:stretch>
+              <a:fillRect/>
+            </a:stretch>
+          </a:blipFill>
+        </p:spPr>
+      </p:sp>
+      <p:sp>
+        <p:nvSpPr>
+          <p:cNvPr id="6" name="Freeform 6"/>
+          <p:cNvSpPr/>
+          <p:nvPr/>
+        </p:nvSpPr>
+        <p:spPr>
+          <a:xfrm rot="-5400000">
+            <a:off x="13505761" y="-2160696"/>
+            <a:ext cx="3892438" cy="5672041"/>
+          </a:xfrm>
+          <a:custGeom>
+            <a:avLst/>
+            <a:gdLst/>
+            <a:ahLst/>
+            <a:cxnLst/>
+            <a:rect l="l" t="t" r="r" b="b"/>
+            <a:pathLst>
+              <a:path w="3892438" h="5672041">
+                <a:moveTo>
+                  <a:pt x="0" y="0"/>
+                </a:moveTo>
+                <a:lnTo>
+                  <a:pt x="3892438" y="0"/>
+                </a:lnTo>
+                <a:lnTo>
+                  <a:pt x="3892438" y="5672040"/>
+                </a:lnTo>
+                <a:lnTo>
+                  <a:pt x="0" y="5672040"/>
+                </a:lnTo>
+                <a:lnTo>
+                  <a:pt x="0" y="0"/>
+                </a:lnTo>
+                <a:close/>
+              </a:path>
+            </a:pathLst>
+          </a:custGeom>
+          <a:blipFill>
+            <a:blip>
               <a:extLst>
                 <a:ext uri="{96DAC541-7B7A-43D3-8B79-37D633B846F1}">
                   <asvg:svgBlip xmlns:asvg="http://schemas.microsoft.com/office/drawing/2016/SVG/main" r:embed="rId4"/>
@@ -7773,20 +7827,20 @@
               </a:extLst>
             </a:blip>
             <a:stretch>
-              <a:fillRect l="0" t="0" r="0" b="0"/>
+              <a:fillRect/>
             </a:stretch>
           </a:blipFill>
         </p:spPr>
       </p:sp>
       <p:sp>
         <p:nvSpPr>
-          <p:cNvPr name="Freeform 6" id="6"/>
+          <p:cNvPr id="7" name="Freeform 7"/>
           <p:cNvSpPr/>
           <p:nvPr/>
         </p:nvSpPr>
         <p:spPr>
-          <a:xfrm flipH="false" flipV="false" rot="-5400000">
-            <a:off x="13505761" y="-2160696"/>
+          <a:xfrm rot="-5400000" flipV="1">
+            <a:off x="889801" y="-2160696"/>
             <a:ext cx="3892438" cy="5672041"/>
           </a:xfrm>
           <a:custGeom>
@@ -7794,135 +7848,30 @@
             <a:gdLst/>
             <a:ahLst/>
             <a:cxnLst/>
-            <a:rect r="r" b="b" t="t" l="l"/>
+            <a:rect l="l" t="t" r="r" b="b"/>
             <a:pathLst>
-              <a:path h="5672041" w="3892438">
+              <a:path w="3892438" h="5672041">
                 <a:moveTo>
+                  <a:pt x="0" y="5672040"/>
+                </a:moveTo>
+                <a:lnTo>
+                  <a:pt x="3892438" y="5672040"/>
+                </a:lnTo>
+                <a:lnTo>
+                  <a:pt x="3892438" y="0"/>
+                </a:lnTo>
+                <a:lnTo>
                   <a:pt x="0" y="0"/>
-                </a:moveTo>
-                <a:lnTo>
-                  <a:pt x="3892438" y="0"/>
-                </a:lnTo>
-                <a:lnTo>
-                  <a:pt x="3892438" y="5672040"/>
                 </a:lnTo>
                 <a:lnTo>
                   <a:pt x="0" y="5672040"/>
-                </a:lnTo>
-                <a:lnTo>
-                  <a:pt x="0" y="0"/>
                 </a:lnTo>
                 <a:close/>
               </a:path>
             </a:pathLst>
           </a:custGeom>
           <a:blipFill>
-            <a:blip r:embed="rId5">
-              <a:extLst>
-                <a:ext uri="{96DAC541-7B7A-43D3-8B79-37D633B846F1}">
-                  <asvg:svgBlip xmlns:asvg="http://schemas.microsoft.com/office/drawing/2016/SVG/main" r:embed="rId6"/>
-                </a:ext>
-              </a:extLst>
-            </a:blip>
-            <a:stretch>
-              <a:fillRect l="0" t="0" r="0" b="0"/>
-            </a:stretch>
-          </a:blipFill>
-        </p:spPr>
-      </p:sp>
-      <p:sp>
-        <p:nvSpPr>
-          <p:cNvPr name="Freeform 7" id="7"/>
-          <p:cNvSpPr/>
-          <p:nvPr/>
-        </p:nvSpPr>
-        <p:spPr>
-          <a:xfrm flipH="false" flipV="true" rot="-5400000">
-            <a:off x="889801" y="-2160696"/>
-            <a:ext cx="3892438" cy="5672041"/>
-          </a:xfrm>
-          <a:custGeom>
-            <a:avLst/>
-            <a:gdLst/>
-            <a:ahLst/>
-            <a:cxnLst/>
-            <a:rect r="r" b="b" t="t" l="l"/>
-            <a:pathLst>
-              <a:path h="5672041" w="3892438">
-                <a:moveTo>
-                  <a:pt x="0" y="5672040"/>
-                </a:moveTo>
-                <a:lnTo>
-                  <a:pt x="3892438" y="5672040"/>
-                </a:lnTo>
-                <a:lnTo>
-                  <a:pt x="3892438" y="0"/>
-                </a:lnTo>
-                <a:lnTo>
-                  <a:pt x="0" y="0"/>
-                </a:lnTo>
-                <a:lnTo>
-                  <a:pt x="0" y="5672040"/>
-                </a:lnTo>
-                <a:close/>
-              </a:path>
-            </a:pathLst>
-          </a:custGeom>
-          <a:blipFill>
-            <a:blip r:embed="rId5">
-              <a:extLst>
-                <a:ext uri="{96DAC541-7B7A-43D3-8B79-37D633B846F1}">
-                  <asvg:svgBlip xmlns:asvg="http://schemas.microsoft.com/office/drawing/2016/SVG/main" r:embed="rId6"/>
-                </a:ext>
-              </a:extLst>
-            </a:blip>
-            <a:stretch>
-              <a:fillRect l="0" t="0" r="0" b="0"/>
-            </a:stretch>
-          </a:blipFill>
-        </p:spPr>
-      </p:sp>
-      <p:sp>
-        <p:nvSpPr>
-          <p:cNvPr name="Freeform 8" id="8"/>
-          <p:cNvSpPr/>
-          <p:nvPr/>
-        </p:nvSpPr>
-        <p:spPr>
-          <a:xfrm flipH="false" flipV="false" rot="0">
-            <a:off x="-1756460" y="8867605"/>
-            <a:ext cx="20044460" cy="2630835"/>
-          </a:xfrm>
-          <a:custGeom>
-            <a:avLst/>
-            <a:gdLst/>
-            <a:ahLst/>
-            <a:cxnLst/>
-            <a:rect r="r" b="b" t="t" l="l"/>
-            <a:pathLst>
-              <a:path h="2630835" w="20044460">
-                <a:moveTo>
-                  <a:pt x="0" y="0"/>
-                </a:moveTo>
-                <a:lnTo>
-                  <a:pt x="20044460" y="0"/>
-                </a:lnTo>
-                <a:lnTo>
-                  <a:pt x="20044460" y="2630836"/>
-                </a:lnTo>
-                <a:lnTo>
-                  <a:pt x="0" y="2630836"/>
-                </a:lnTo>
-                <a:lnTo>
-                  <a:pt x="0" y="0"/>
-                </a:lnTo>
-                <a:close/>
-              </a:path>
-            </a:pathLst>
-          </a:custGeom>
-          <a:blipFill>
-            <a:blip r:embed="rId3">
-              <a:alphaModFix amt="9999"/>
+            <a:blip>
               <a:extLst>
                 <a:ext uri="{96DAC541-7B7A-43D3-8B79-37D633B846F1}">
                   <asvg:svgBlip xmlns:asvg="http://schemas.microsoft.com/office/drawing/2016/SVG/main" r:embed="rId4"/>
@@ -7930,19 +7879,72 @@
               </a:extLst>
             </a:blip>
             <a:stretch>
-              <a:fillRect l="0" t="0" r="0" b="0"/>
+              <a:fillRect/>
             </a:stretch>
           </a:blipFill>
         </p:spPr>
       </p:sp>
+      <p:sp>
+        <p:nvSpPr>
+          <p:cNvPr id="8" name="Freeform 8"/>
+          <p:cNvSpPr/>
+          <p:nvPr/>
+        </p:nvSpPr>
+        <p:spPr>
+          <a:xfrm>
+            <a:off x="-1756460" y="8867605"/>
+            <a:ext cx="20044460" cy="2630835"/>
+          </a:xfrm>
+          <a:custGeom>
+            <a:avLst/>
+            <a:gdLst/>
+            <a:ahLst/>
+            <a:cxnLst/>
+            <a:rect l="l" t="t" r="r" b="b"/>
+            <a:pathLst>
+              <a:path w="20044460" h="2630835">
+                <a:moveTo>
+                  <a:pt x="0" y="0"/>
+                </a:moveTo>
+                <a:lnTo>
+                  <a:pt x="20044460" y="0"/>
+                </a:lnTo>
+                <a:lnTo>
+                  <a:pt x="20044460" y="2630836"/>
+                </a:lnTo>
+                <a:lnTo>
+                  <a:pt x="0" y="2630836"/>
+                </a:lnTo>
+                <a:lnTo>
+                  <a:pt x="0" y="0"/>
+                </a:lnTo>
+                <a:close/>
+              </a:path>
+            </a:pathLst>
+          </a:custGeom>
+          <a:blipFill>
+            <a:blip>
+              <a:alphaModFix amt="9999"/>
+              <a:extLst>
+                <a:ext uri="{96DAC541-7B7A-43D3-8B79-37D633B846F1}">
+                  <asvg:svgBlip xmlns:asvg="http://schemas.microsoft.com/office/drawing/2016/SVG/main" r:embed="rId3"/>
+                </a:ext>
+              </a:extLst>
+            </a:blip>
+            <a:stretch>
+              <a:fillRect/>
+            </a:stretch>
+          </a:blipFill>
+        </p:spPr>
+      </p:sp>
       <p:grpSp>
         <p:nvGrpSpPr>
-          <p:cNvPr name="Group 9" id="9"/>
+          <p:cNvPr id="9" name="Group 9"/>
           <p:cNvGrpSpPr/>
           <p:nvPr/>
         </p:nvGrpSpPr>
         <p:grpSpPr>
-          <a:xfrm rot="0">
+          <a:xfrm>
             <a:off x="0" y="9930289"/>
             <a:ext cx="18288000" cy="356711"/>
             <a:chOff x="0" y="0"/>
@@ -7951,12 +7953,12 @@
         </p:grpSpPr>
         <p:sp>
           <p:nvSpPr>
-            <p:cNvPr name="Freeform 10" id="10"/>
+            <p:cNvPr id="10" name="Freeform 10"/>
             <p:cNvSpPr/>
             <p:nvPr/>
           </p:nvSpPr>
           <p:spPr>
-            <a:xfrm flipH="false" flipV="false" rot="0">
+            <a:xfrm>
               <a:off x="0" y="0"/>
               <a:ext cx="4816592" cy="93949"/>
             </a:xfrm>
@@ -7965,9 +7967,9 @@
               <a:gdLst/>
               <a:ahLst/>
               <a:cxnLst/>
-              <a:rect r="r" b="b" t="t" l="l"/>
+              <a:rect l="l" t="t" r="r" b="b"/>
               <a:pathLst>
-                <a:path h="93949" w="4816592">
+                <a:path w="4816592" h="93949">
                   <a:moveTo>
                     <a:pt x="0" y="0"/>
                   </a:moveTo>
@@ -7991,8 +7993,8 @@
         </p:sp>
         <p:sp>
           <p:nvSpPr>
-            <p:cNvPr name="TextBox 11" id="11"/>
-            <p:cNvSpPr txBox="true"/>
+            <p:cNvPr id="11" name="TextBox 11"/>
+            <p:cNvSpPr txBox="1"/>
             <p:nvPr/>
           </p:nvSpPr>
           <p:spPr>
@@ -8005,7 +8007,7 @@
             </a:prstGeom>
           </p:spPr>
           <p:txBody>
-            <a:bodyPr anchor="ctr" rtlCol="false" tIns="50800" lIns="50800" bIns="50800" rIns="50800"/>
+            <a:bodyPr lIns="50800" tIns="50800" rIns="50800" bIns="50800" rtlCol="0" anchor="ctr"/>
             <a:lstStyle/>
             <a:p>
               <a:pPr algn="ctr">
@@ -8013,18 +8015,19 @@
                   <a:spcPts val="2659"/>
                 </a:lnSpc>
               </a:pPr>
+              <a:endParaRPr/>
             </a:p>
           </p:txBody>
         </p:sp>
       </p:grpSp>
       <p:sp>
         <p:nvSpPr>
-          <p:cNvPr name="Freeform 12" id="12"/>
+          <p:cNvPr id="12" name="Freeform 12"/>
           <p:cNvSpPr/>
           <p:nvPr/>
         </p:nvSpPr>
         <p:spPr>
-          <a:xfrm flipH="false" flipV="false" rot="5400000">
+          <a:xfrm rot="5400000">
             <a:off x="889801" y="6422280"/>
             <a:ext cx="3892438" cy="5672041"/>
           </a:xfrm>
@@ -8033,9 +8036,9 @@
             <a:gdLst/>
             <a:ahLst/>
             <a:cxnLst/>
-            <a:rect r="r" b="b" t="t" l="l"/>
+            <a:rect l="l" t="t" r="r" b="b"/>
             <a:pathLst>
-              <a:path h="5672041" w="3892438">
+              <a:path w="3892438" h="5672041">
                 <a:moveTo>
                   <a:pt x="0" y="0"/>
                 </a:moveTo>
@@ -8056,27 +8059,27 @@
             </a:pathLst>
           </a:custGeom>
           <a:blipFill>
-            <a:blip r:embed="rId5">
+            <a:blip>
               <a:extLst>
                 <a:ext uri="{96DAC541-7B7A-43D3-8B79-37D633B846F1}">
-                  <asvg:svgBlip xmlns:asvg="http://schemas.microsoft.com/office/drawing/2016/SVG/main" r:embed="rId6"/>
+                  <asvg:svgBlip xmlns:asvg="http://schemas.microsoft.com/office/drawing/2016/SVG/main" r:embed="rId4"/>
                 </a:ext>
               </a:extLst>
             </a:blip>
             <a:stretch>
-              <a:fillRect l="0" t="0" r="0" b="0"/>
+              <a:fillRect/>
             </a:stretch>
           </a:blipFill>
         </p:spPr>
       </p:sp>
       <p:sp>
         <p:nvSpPr>
-          <p:cNvPr name="Freeform 13" id="13"/>
+          <p:cNvPr id="13" name="Freeform 13"/>
           <p:cNvSpPr/>
           <p:nvPr/>
         </p:nvSpPr>
         <p:spPr>
-          <a:xfrm flipH="false" flipV="true" rot="5400000">
+          <a:xfrm rot="5400000" flipV="1">
             <a:off x="13505761" y="6422280"/>
             <a:ext cx="3892438" cy="5672041"/>
           </a:xfrm>
@@ -8085,9 +8088,9 @@
             <a:gdLst/>
             <a:ahLst/>
             <a:cxnLst/>
-            <a:rect r="r" b="b" t="t" l="l"/>
+            <a:rect l="l" t="t" r="r" b="b"/>
             <a:pathLst>
-              <a:path h="5672041" w="3892438">
+              <a:path w="3892438" h="5672041">
                 <a:moveTo>
                   <a:pt x="0" y="5672040"/>
                 </a:moveTo>
@@ -8108,27 +8111,27 @@
             </a:pathLst>
           </a:custGeom>
           <a:blipFill>
-            <a:blip r:embed="rId5">
+            <a:blip>
               <a:extLst>
                 <a:ext uri="{96DAC541-7B7A-43D3-8B79-37D633B846F1}">
-                  <asvg:svgBlip xmlns:asvg="http://schemas.microsoft.com/office/drawing/2016/SVG/main" r:embed="rId6"/>
+                  <asvg:svgBlip xmlns:asvg="http://schemas.microsoft.com/office/drawing/2016/SVG/main" r:embed="rId4"/>
                 </a:ext>
               </a:extLst>
             </a:blip>
             <a:stretch>
-              <a:fillRect l="0" t="0" r="0" b="0"/>
+              <a:fillRect/>
             </a:stretch>
           </a:blipFill>
         </p:spPr>
       </p:sp>
       <p:sp>
         <p:nvSpPr>
-          <p:cNvPr name="TextBox 14" id="14"/>
-          <p:cNvSpPr txBox="true"/>
+          <p:cNvPr id="14" name="TextBox 14"/>
+          <p:cNvSpPr txBox="1"/>
           <p:nvPr/>
         </p:nvSpPr>
         <p:spPr>
-          <a:xfrm rot="0">
+          <a:xfrm>
             <a:off x="5016387" y="7929275"/>
             <a:ext cx="8255227" cy="553905"/>
           </a:xfrm>
@@ -8137,7 +8140,7 @@
           </a:prstGeom>
         </p:spPr>
         <p:txBody>
-          <a:bodyPr anchor="t" rtlCol="false" tIns="0" lIns="0" bIns="0" rIns="0">
+          <a:bodyPr lIns="0" tIns="0" rIns="0" bIns="0" rtlCol="0" anchor="t">
             <a:spAutoFit/>
           </a:bodyPr>
           <a:lstStyle/>
